--- a/mon/toan/slide/lop10/Slide_TOAN10_STEM_Bai4_T12-14.pptx
+++ b/mon/toan/slide/lop10/Slide_TOAN10_STEM_Bai4_T12-14.pptx
@@ -8,6 +8,7 @@
     <p:sldId id="256" r:id="rId7"/>
     <p:sldId id="257" r:id="rId8"/>
     <p:sldId id="258" r:id="rId9"/>
+    <p:sldId id="274" r:id="rId25"/>
     <p:sldId id="259" r:id="rId10"/>
     <p:sldId id="260" r:id="rId11"/>
     <p:sldId id="261" r:id="rId12"/>
@@ -3340,7 +3341,7 @@
                 </a:solidFill>
                 <a:latin typeface="Calibri"/>
               </a:rPr>
-              <a:t>GV soạn: Trương Tử Trang – Trường THPT Vĩnh Thạnh</a:t>
+              <a:t>GV soạn: TTT – Trường THPT</a:t>
             </a:r>
           </a:p>
         </p:txBody>
@@ -3424,7 +3425,7 @@
         <p:spPr>
           <a:xfrm>
             <a:off x="731520" y="274320"/>
-            <a:ext cx="9848088" cy="868680"/>
+            <a:ext cx="10972800" cy="868680"/>
           </a:xfrm>
           <a:prstGeom prst="rect">
             <a:avLst/>
@@ -3444,7 +3445,7 @@
                 </a:solidFill>
                 <a:latin typeface="Arial"/>
               </a:rPr>
-              <a:t>TRẠM KIỂM CHỨNG AI</a:t>
+              <a:t>4. KHẨU PHẦN MẪU</a:t>
             </a:r>
           </a:p>
         </p:txBody>
@@ -3523,7 +3524,7 @@
                 </a:solidFill>
                 <a:latin typeface="Calibri"/>
               </a:rPr>
-              <a:t>Toán 10 · Bài 4. Hệ bất phương trình bậc nhất hai ẩn (STEM)          10</a:t>
+              <a:t>Toán 10 · Bài 4. Hệ bất phương trình bậc nhất hai ẩn (STEM)          9</a:t>
             </a:r>
           </a:p>
         </p:txBody>
@@ -3537,7 +3538,7 @@
         <p:spPr>
           <a:xfrm>
             <a:off x="731520" y="1508760"/>
-            <a:ext cx="10789920" cy="1700784"/>
+            <a:ext cx="6400800" cy="2078736"/>
           </a:xfrm>
           <a:prstGeom prst="rect">
             <a:avLst/>
@@ -3549,6 +3550,22 @@
             <a:spAutoFit/>
           </a:bodyPr>
           <a:lstStyle/>
+          <a:p>
+            <a:pPr algn="l">
+              <a:spcAft>
+                <a:spcPts val="1000"/>
+              </a:spcAft>
+            </a:pPr>
+            <a:r>
+              <a:rPr sz="2200" b="1">
+                <a:solidFill>
+                  <a:srgbClr val="1E40AF"/>
+                </a:solidFill>
+                <a:latin typeface="Calibri"/>
+              </a:rPr>
+              <a:t>x lạng thịt nạc, y lạng đậu phụ</a:t>
+            </a:r>
+          </a:p>
           <a:p>
             <a:pPr algn="l" marL="365760" indent="-365760">
               <a:spcAft>
@@ -3561,13 +3578,13 @@
               <a:buChar char="•"/>
             </a:pPr>
             <a:r>
-              <a:rPr sz="2400">
+              <a:rPr sz="2200">
                 <a:solidFill>
                   <a:srgbClr val="1E293B"/>
                 </a:solidFill>
                 <a:latin typeface="Calibri"/>
               </a:rPr>
-              <a:t>AI: 100 g thịt + 200 g đậu phụ rẻ nhất</a:t>
+              <a:t>Protein: 20x + 10y ≥ 30</a:t>
             </a:r>
           </a:p>
           <a:p>
@@ -3582,29 +3599,34 @@
               <a:buChar char="•"/>
             </a:pPr>
             <a:r>
-              <a:rPr sz="2400">
+              <a:rPr sz="2200">
                 <a:solidFill>
                   <a:srgbClr val="1E293B"/>
                 </a:solidFill>
                 <a:latin typeface="Calibri"/>
               </a:rPr>
-              <a:t>Đề xuất của AI có đúng không?</a:t>
-            </a:r>
-          </a:p>
-          <a:p>
-            <a:pPr algn="l">
+              <a:t>Khối lượng: x + y ≤ 3;  y ≤ 2</a:t>
+            </a:r>
+          </a:p>
+          <a:p>
+            <a:pPr algn="l" marL="365760" indent="-365760">
               <a:spcAft>
                 <a:spcPts val="1000"/>
               </a:spcAft>
+              <a:buClr>
+                <a:srgbClr val="1E40AF"/>
+              </a:buClr>
+              <a:buFont typeface="Arial"/>
+              <a:buChar char="•"/>
             </a:pPr>
             <a:r>
-              <a:rPr sz="2400" b="1">
-                <a:solidFill>
-                  <a:srgbClr val="1E40AF"/>
+              <a:rPr sz="2200">
+                <a:solidFill>
+                  <a:srgbClr val="1E293B"/>
                 </a:solidFill>
                 <a:latin typeface="Calibri"/>
               </a:rPr>
-              <a:t>Gợi mở: Tính chi phí tại mọi đỉnh</a:t>
+              <a:t>Chi phí: 15x + 3y ≤ 27 (nghìn)</a:t>
             </a:r>
           </a:p>
         </p:txBody>
@@ -3617,17 +3639,21 @@
         </p:nvSpPr>
         <p:spPr>
           <a:xfrm>
-            <a:off x="10701223" y="457200"/>
-            <a:ext cx="941832" cy="457200"/>
+            <a:off x="731520" y="3724656"/>
+            <a:ext cx="6400800" cy="1066799"/>
           </a:xfrm>
           <a:prstGeom prst="roundRect">
-            <a:avLst/>
+            <a:avLst>
+              <a:gd name="adj" fmla="val 8000"/>
+            </a:avLst>
           </a:prstGeom>
           <a:solidFill>
-            <a:srgbClr val="1E40AF"/>
+            <a:srgbClr val="FEF2F2"/>
           </a:solidFill>
-          <a:ln>
-            <a:noFill/>
+          <a:ln w="19050">
+            <a:solidFill>
+              <a:srgbClr val="991B1B"/>
+            </a:solidFill>
           </a:ln>
           <a:effectLst/>
         </p:spPr>
@@ -3646,22 +3672,92 @@
           </a:fontRef>
         </p:style>
         <p:txBody>
-          <a:bodyPr rtlCol="0" anchor="ctr" tIns="0" bIns="0"/>
+          <a:bodyPr rtlCol="0" anchor="ctr"/>
           <a:lstStyle/>
           <a:p>
             <a:pPr algn="ctr"/>
-            <a:r>
-              <a:rPr sz="1400" b="1">
-                <a:solidFill>
-                  <a:srgbClr val="FFFFFF"/>
-                </a:solidFill>
-                <a:latin typeface="Arial"/>
-              </a:rPr>
-              <a:t>ĐỀ BÀI</a:t>
-            </a:r>
-          </a:p>
-        </p:txBody>
-      </p:sp>
+          </a:p>
+        </p:txBody>
+      </p:sp>
+      <p:sp>
+        <p:nvSpPr>
+          <p:cNvPr id="8" name="TextBox 7"/>
+          <p:cNvSpPr txBox="1"/>
+          <p:nvPr/>
+        </p:nvSpPr>
+        <p:spPr>
+          <a:xfrm>
+            <a:off x="914400" y="3724656"/>
+            <a:ext cx="6035040" cy="1066799"/>
+          </a:xfrm>
+          <a:prstGeom prst="rect">
+            <a:avLst/>
+          </a:prstGeom>
+          <a:noFill/>
+        </p:spPr>
+        <p:txBody>
+          <a:bodyPr wrap="square" anchor="ctr">
+            <a:spAutoFit/>
+          </a:bodyPr>
+          <a:lstStyle/>
+          <a:p>
+            <a:pPr algn="l">
+              <a:spcAft>
+                <a:spcPts val="400"/>
+              </a:spcAft>
+            </a:pPr>
+            <a:r>
+              <a:rPr sz="2200" b="1">
+                <a:solidFill>
+                  <a:srgbClr val="991B1B"/>
+                </a:solidFill>
+                <a:latin typeface="Calibri"/>
+              </a:rPr>
+              <a:t>Rẻ nhất: A(0,5; 2) – 13 500 đồng</a:t>
+            </a:r>
+          </a:p>
+          <a:p>
+            <a:pPr algn="l">
+              <a:spcAft>
+                <a:spcPts val="400"/>
+              </a:spcAft>
+            </a:pPr>
+            <a:r>
+              <a:rPr sz="2200" b="1">
+                <a:solidFill>
+                  <a:srgbClr val="991B1B"/>
+                </a:solidFill>
+                <a:latin typeface="Calibri"/>
+              </a:rPr>
+              <a:t>Nhiều đạm nhất: C(1,5; 1,5) – 45 g</a:t>
+            </a:r>
+          </a:p>
+        </p:txBody>
+      </p:sp>
+      <p:pic>
+        <p:nvPicPr>
+          <p:cNvPr id="9" name="Picture 8" descr="rIdS8.png"/>
+          <p:cNvPicPr>
+            <a:picLocks noChangeAspect="1"/>
+          </p:cNvPicPr>
+          <p:nvPr/>
+        </p:nvPicPr>
+        <p:blipFill>
+          <a:blip r:embed="rId2"/>
+          <a:stretch>
+            <a:fillRect/>
+          </a:stretch>
+        </p:blipFill>
+        <p:spPr>
+          <a:xfrm>
+            <a:off x="7406640" y="1792321"/>
+            <a:ext cx="4389120" cy="4050597"/>
+          </a:xfrm>
+          <a:prstGeom prst="rect">
+            <a:avLst/>
+          </a:prstGeom>
+        </p:spPr>
+      </p:pic>
     </p:spTree>
   </p:cSld>
   <p:clrMapOvr>
@@ -3741,7 +3837,7 @@
         <p:spPr>
           <a:xfrm>
             <a:off x="731520" y="274320"/>
-            <a:ext cx="9610344" cy="868680"/>
+            <a:ext cx="9848088" cy="868680"/>
           </a:xfrm>
           <a:prstGeom prst="rect">
             <a:avLst/>
@@ -3840,7 +3936,7 @@
                 </a:solidFill>
                 <a:latin typeface="Calibri"/>
               </a:rPr>
-              <a:t>Toán 10 · Bài 4. Hệ bất phương trình bậc nhất hai ẩn (STEM)          11</a:t>
+              <a:t>Toán 10 · Bài 4. Hệ bất phương trình bậc nhất hai ẩn (STEM)          10</a:t>
             </a:r>
           </a:p>
         </p:txBody>
@@ -3866,22 +3962,6 @@
             <a:spAutoFit/>
           </a:bodyPr>
           <a:lstStyle/>
-          <a:p>
-            <a:pPr algn="l">
-              <a:spcAft>
-                <a:spcPts val="1000"/>
-              </a:spcAft>
-            </a:pPr>
-            <a:r>
-              <a:rPr sz="2400" b="1">
-                <a:solidFill>
-                  <a:srgbClr val="1E40AF"/>
-                </a:solidFill>
-                <a:latin typeface="Calibri"/>
-              </a:rPr>
-              <a:t>AI: 100 g thịt + 200 g đậu phụ rẻ nhất</a:t>
-            </a:r>
-          </a:p>
           <a:p>
             <a:pPr algn="l" marL="365760" indent="-365760">
               <a:spcAft>
@@ -3900,7 +3980,7 @@
                 </a:solidFill>
                 <a:latin typeface="Calibri"/>
               </a:rPr>
-              <a:t>(1; 2) thuộc miền nghiệm (đỉnh B)</a:t>
+              <a:t>AI: 100 g thịt + 200 g đậu phụ rẻ nhất</a:t>
             </a:r>
           </a:p>
           <a:p>
@@ -3921,7 +4001,23 @@
                 </a:solidFill>
                 <a:latin typeface="Calibri"/>
               </a:rPr>
-              <a:t>Chi phí 21 nghìn &gt; 13,5 nghìn</a:t>
+              <a:t>Đề xuất của AI có đúng không?</a:t>
+            </a:r>
+          </a:p>
+          <a:p>
+            <a:pPr algn="l">
+              <a:spcAft>
+                <a:spcPts val="1000"/>
+              </a:spcAft>
+            </a:pPr>
+            <a:r>
+              <a:rPr sz="2400" b="1">
+                <a:solidFill>
+                  <a:srgbClr val="1E40AF"/>
+                </a:solidFill>
+                <a:latin typeface="Calibri"/>
+              </a:rPr>
+              <a:t>Gợi mở: Tính chi phí tại mọi đỉnh</a:t>
             </a:r>
           </a:p>
         </p:txBody>
@@ -3934,21 +4030,17 @@
         </p:nvSpPr>
         <p:spPr>
           <a:xfrm>
-            <a:off x="731520" y="3346704"/>
-            <a:ext cx="8686800" cy="685800"/>
+            <a:off x="10701223" y="457200"/>
+            <a:ext cx="941832" cy="457200"/>
           </a:xfrm>
           <a:prstGeom prst="roundRect">
-            <a:avLst>
-              <a:gd name="adj" fmla="val 8000"/>
-            </a:avLst>
+            <a:avLst/>
           </a:prstGeom>
           <a:solidFill>
-            <a:srgbClr val="FEF2F2"/>
+            <a:srgbClr val="1E40AF"/>
           </a:solidFill>
-          <a:ln w="19050">
-            <a:solidFill>
-              <a:srgbClr val="991B1B"/>
-            </a:solidFill>
+          <a:ln>
+            <a:noFill/>
           </a:ln>
           <a:effectLst/>
         </p:spPr>
@@ -3967,93 +4059,10 @@
           </a:fontRef>
         </p:style>
         <p:txBody>
-          <a:bodyPr rtlCol="0" anchor="ctr"/>
+          <a:bodyPr rtlCol="0" anchor="ctr" tIns="0" bIns="0"/>
           <a:lstStyle/>
           <a:p>
             <a:pPr algn="ctr"/>
-          </a:p>
-        </p:txBody>
-      </p:sp>
-      <p:sp>
-        <p:nvSpPr>
-          <p:cNvPr id="8" name="TextBox 7"/>
-          <p:cNvSpPr txBox="1"/>
-          <p:nvPr/>
-        </p:nvSpPr>
-        <p:spPr>
-          <a:xfrm>
-            <a:off x="914400" y="3346704"/>
-            <a:ext cx="8321040" cy="685800"/>
-          </a:xfrm>
-          <a:prstGeom prst="rect">
-            <a:avLst/>
-          </a:prstGeom>
-          <a:noFill/>
-        </p:spPr>
-        <p:txBody>
-          <a:bodyPr wrap="square" anchor="ctr">
-            <a:spAutoFit/>
-          </a:bodyPr>
-          <a:lstStyle/>
-          <a:p>
-            <a:pPr algn="l">
-              <a:spcAft>
-                <a:spcPts val="400"/>
-              </a:spcAft>
-            </a:pPr>
-            <a:r>
-              <a:rPr sz="2400" b="1">
-                <a:solidFill>
-                  <a:srgbClr val="991B1B"/>
-                </a:solidFill>
-                <a:latin typeface="Calibri"/>
-              </a:rPr>
-              <a:t>AI không xét đủ các đỉnh</a:t>
-            </a:r>
-          </a:p>
-        </p:txBody>
-      </p:sp>
-      <p:sp>
-        <p:nvSpPr>
-          <p:cNvPr id="9" name="Rounded Rectangle 8"/>
-          <p:cNvSpPr/>
-          <p:nvPr/>
-        </p:nvSpPr>
-        <p:spPr>
-          <a:xfrm>
-            <a:off x="10463479" y="457200"/>
-            <a:ext cx="1179576" cy="457200"/>
-          </a:xfrm>
-          <a:prstGeom prst="roundRect">
-            <a:avLst/>
-          </a:prstGeom>
-          <a:solidFill>
-            <a:srgbClr val="166534"/>
-          </a:solidFill>
-          <a:ln>
-            <a:noFill/>
-          </a:ln>
-          <a:effectLst/>
-        </p:spPr>
-        <p:style>
-          <a:lnRef idx="1">
-            <a:schemeClr val="accent1"/>
-          </a:lnRef>
-          <a:fillRef idx="3">
-            <a:schemeClr val="accent1"/>
-          </a:fillRef>
-          <a:effectRef idx="2">
-            <a:schemeClr val="accent1"/>
-          </a:effectRef>
-          <a:fontRef idx="minor">
-            <a:schemeClr val="lt1"/>
-          </a:fontRef>
-        </p:style>
-        <p:txBody>
-          <a:bodyPr rtlCol="0" anchor="ctr" tIns="0" bIns="0"/>
-          <a:lstStyle/>
-          <a:p>
-            <a:pPr algn="ctr"/>
             <a:r>
               <a:rPr sz="1400" b="1">
                 <a:solidFill>
@@ -4061,7 +4070,7 @@
                 </a:solidFill>
                 <a:latin typeface="Arial"/>
               </a:rPr>
-              <a:t>LỜI GIẢI</a:t>
+              <a:t>ĐỀ BÀI</a:t>
             </a:r>
           </a:p>
         </p:txBody>
@@ -4145,7 +4154,7 @@
         <p:spPr>
           <a:xfrm>
             <a:off x="731520" y="274320"/>
-            <a:ext cx="10972800" cy="868680"/>
+            <a:ext cx="9610344" cy="868680"/>
           </a:xfrm>
           <a:prstGeom prst="rect">
             <a:avLst/>
@@ -4165,7 +4174,7 @@
                 </a:solidFill>
                 <a:latin typeface="Arial"/>
               </a:rPr>
-              <a:t>CHẾ TẠO VÀ THỬ NGHIỆM</a:t>
+              <a:t>TRẠM KIỂM CHỨNG AI</a:t>
             </a:r>
           </a:p>
         </p:txBody>
@@ -4244,7 +4253,7 @@
                 </a:solidFill>
                 <a:latin typeface="Calibri"/>
               </a:rPr>
-              <a:t>Toán 10 · Bài 4. Hệ bất phương trình bậc nhất hai ẩn (STEM)          12</a:t>
+              <a:t>Toán 10 · Bài 4. Hệ bất phương trình bậc nhất hai ẩn (STEM)          11</a:t>
             </a:r>
           </a:p>
         </p:txBody>
@@ -4258,7 +4267,7 @@
         <p:spPr>
           <a:xfrm>
             <a:off x="731520" y="1508760"/>
-            <a:ext cx="10789920" cy="2834640"/>
+            <a:ext cx="10789920" cy="1700784"/>
           </a:xfrm>
           <a:prstGeom prst="rect">
             <a:avLst/>
@@ -4270,6 +4279,22 @@
             <a:spAutoFit/>
           </a:bodyPr>
           <a:lstStyle/>
+          <a:p>
+            <a:pPr algn="l">
+              <a:spcAft>
+                <a:spcPts val="1000"/>
+              </a:spcAft>
+            </a:pPr>
+            <a:r>
+              <a:rPr sz="2400" b="1">
+                <a:solidFill>
+                  <a:srgbClr val="1E40AF"/>
+                </a:solidFill>
+                <a:latin typeface="Calibri"/>
+              </a:rPr>
+              <a:t>AI: 100 g thịt + 200 g đậu phụ rẻ nhất</a:t>
+            </a:r>
+          </a:p>
           <a:p>
             <a:pPr algn="l" marL="365760" indent="-365760">
               <a:spcAft>
@@ -4288,7 +4313,7 @@
                 </a:solidFill>
                 <a:latin typeface="Calibri"/>
               </a:rPr>
-              <a:t>Phiếu 4: bản thiết kế suất ăn</a:t>
+              <a:t>(1; 2) thuộc miền nghiệm (đỉnh B)</a:t>
             </a:r>
           </a:p>
           <a:p>
@@ -4309,9 +4334,355 @@
                 </a:solidFill>
                 <a:latin typeface="Calibri"/>
               </a:rPr>
-              <a:t>Mua nguyên liệu, giữ hóa đơn</a:t>
-            </a:r>
-          </a:p>
+              <a:t>Chi phí 21 nghìn &gt; 13,5 nghìn</a:t>
+            </a:r>
+          </a:p>
+        </p:txBody>
+      </p:sp>
+      <p:sp>
+        <p:nvSpPr>
+          <p:cNvPr id="7" name="Rounded Rectangle 6"/>
+          <p:cNvSpPr/>
+          <p:nvPr/>
+        </p:nvSpPr>
+        <p:spPr>
+          <a:xfrm>
+            <a:off x="731520" y="3346704"/>
+            <a:ext cx="8686800" cy="685800"/>
+          </a:xfrm>
+          <a:prstGeom prst="roundRect">
+            <a:avLst>
+              <a:gd name="adj" fmla="val 8000"/>
+            </a:avLst>
+          </a:prstGeom>
+          <a:solidFill>
+            <a:srgbClr val="FEF2F2"/>
+          </a:solidFill>
+          <a:ln w="19050">
+            <a:solidFill>
+              <a:srgbClr val="991B1B"/>
+            </a:solidFill>
+          </a:ln>
+          <a:effectLst/>
+        </p:spPr>
+        <p:style>
+          <a:lnRef idx="1">
+            <a:schemeClr val="accent1"/>
+          </a:lnRef>
+          <a:fillRef idx="3">
+            <a:schemeClr val="accent1"/>
+          </a:fillRef>
+          <a:effectRef idx="2">
+            <a:schemeClr val="accent1"/>
+          </a:effectRef>
+          <a:fontRef idx="minor">
+            <a:schemeClr val="lt1"/>
+          </a:fontRef>
+        </p:style>
+        <p:txBody>
+          <a:bodyPr rtlCol="0" anchor="ctr"/>
+          <a:lstStyle/>
+          <a:p>
+            <a:pPr algn="ctr"/>
+          </a:p>
+        </p:txBody>
+      </p:sp>
+      <p:sp>
+        <p:nvSpPr>
+          <p:cNvPr id="8" name="TextBox 7"/>
+          <p:cNvSpPr txBox="1"/>
+          <p:nvPr/>
+        </p:nvSpPr>
+        <p:spPr>
+          <a:xfrm>
+            <a:off x="914400" y="3346704"/>
+            <a:ext cx="8321040" cy="685800"/>
+          </a:xfrm>
+          <a:prstGeom prst="rect">
+            <a:avLst/>
+          </a:prstGeom>
+          <a:noFill/>
+        </p:spPr>
+        <p:txBody>
+          <a:bodyPr wrap="square" anchor="ctr">
+            <a:spAutoFit/>
+          </a:bodyPr>
+          <a:lstStyle/>
+          <a:p>
+            <a:pPr algn="l">
+              <a:spcAft>
+                <a:spcPts val="400"/>
+              </a:spcAft>
+            </a:pPr>
+            <a:r>
+              <a:rPr sz="2400" b="1">
+                <a:solidFill>
+                  <a:srgbClr val="991B1B"/>
+                </a:solidFill>
+                <a:latin typeface="Calibri"/>
+              </a:rPr>
+              <a:t>AI không xét đủ các đỉnh</a:t>
+            </a:r>
+          </a:p>
+        </p:txBody>
+      </p:sp>
+      <p:sp>
+        <p:nvSpPr>
+          <p:cNvPr id="9" name="Rounded Rectangle 8"/>
+          <p:cNvSpPr/>
+          <p:nvPr/>
+        </p:nvSpPr>
+        <p:spPr>
+          <a:xfrm>
+            <a:off x="10463479" y="457200"/>
+            <a:ext cx="1179576" cy="457200"/>
+          </a:xfrm>
+          <a:prstGeom prst="roundRect">
+            <a:avLst/>
+          </a:prstGeom>
+          <a:solidFill>
+            <a:srgbClr val="166534"/>
+          </a:solidFill>
+          <a:ln>
+            <a:noFill/>
+          </a:ln>
+          <a:effectLst/>
+        </p:spPr>
+        <p:style>
+          <a:lnRef idx="1">
+            <a:schemeClr val="accent1"/>
+          </a:lnRef>
+          <a:fillRef idx="3">
+            <a:schemeClr val="accent1"/>
+          </a:fillRef>
+          <a:effectRef idx="2">
+            <a:schemeClr val="accent1"/>
+          </a:effectRef>
+          <a:fontRef idx="minor">
+            <a:schemeClr val="lt1"/>
+          </a:fontRef>
+        </p:style>
+        <p:txBody>
+          <a:bodyPr rtlCol="0" anchor="ctr" tIns="0" bIns="0"/>
+          <a:lstStyle/>
+          <a:p>
+            <a:pPr algn="ctr"/>
+            <a:r>
+              <a:rPr sz="1400" b="1">
+                <a:solidFill>
+                  <a:srgbClr val="FFFFFF"/>
+                </a:solidFill>
+                <a:latin typeface="Arial"/>
+              </a:rPr>
+              <a:t>LỜI GIẢI</a:t>
+            </a:r>
+          </a:p>
+        </p:txBody>
+      </p:sp>
+    </p:spTree>
+  </p:cSld>
+  <p:clrMapOvr>
+    <a:masterClrMapping/>
+  </p:clrMapOvr>
+</p:sld>
+</file>
+
+<file path=ppt/slides/slide13.xml><?xml version="1.0" encoding="utf-8"?>
+<p:sld xmlns:a="http://schemas.openxmlformats.org/drawingml/2006/main" xmlns:p="http://schemas.openxmlformats.org/presentationml/2006/main" xmlns:r="http://schemas.openxmlformats.org/officeDocument/2006/relationships">
+  <p:cSld>
+    <p:bg>
+      <p:bgPr>
+        <a:solidFill>
+          <a:srgbClr val="FFFFFF"/>
+        </a:solidFill>
+        <a:effectLst/>
+      </p:bgPr>
+    </p:bg>
+    <p:spTree>
+      <p:nvGrpSpPr>
+        <p:cNvPr id="1" name=""/>
+        <p:cNvGrpSpPr/>
+        <p:nvPr/>
+      </p:nvGrpSpPr>
+      <p:grpSpPr/>
+      <p:sp>
+        <p:nvSpPr>
+          <p:cNvPr id="2" name="Rectangle 1"/>
+          <p:cNvSpPr/>
+          <p:nvPr/>
+        </p:nvSpPr>
+        <p:spPr>
+          <a:xfrm>
+            <a:off x="457200" y="384048"/>
+            <a:ext cx="109728" cy="658368"/>
+          </a:xfrm>
+          <a:prstGeom prst="rect">
+            <a:avLst/>
+          </a:prstGeom>
+          <a:solidFill>
+            <a:srgbClr val="1E40AF"/>
+          </a:solidFill>
+          <a:ln>
+            <a:noFill/>
+          </a:ln>
+          <a:effectLst/>
+        </p:spPr>
+        <p:style>
+          <a:lnRef idx="1">
+            <a:schemeClr val="accent1"/>
+          </a:lnRef>
+          <a:fillRef idx="3">
+            <a:schemeClr val="accent1"/>
+          </a:fillRef>
+          <a:effectRef idx="2">
+            <a:schemeClr val="accent1"/>
+          </a:effectRef>
+          <a:fontRef idx="minor">
+            <a:schemeClr val="lt1"/>
+          </a:fontRef>
+        </p:style>
+        <p:txBody>
+          <a:bodyPr rtlCol="0" anchor="ctr"/>
+          <a:lstStyle/>
+          <a:p>
+            <a:pPr algn="ctr"/>
+          </a:p>
+        </p:txBody>
+      </p:sp>
+      <p:sp>
+        <p:nvSpPr>
+          <p:cNvPr id="3" name="TextBox 2"/>
+          <p:cNvSpPr txBox="1"/>
+          <p:nvPr/>
+        </p:nvSpPr>
+        <p:spPr>
+          <a:xfrm>
+            <a:off x="731520" y="274320"/>
+            <a:ext cx="10972800" cy="868680"/>
+          </a:xfrm>
+          <a:prstGeom prst="rect">
+            <a:avLst/>
+          </a:prstGeom>
+          <a:noFill/>
+        </p:spPr>
+        <p:txBody>
+          <a:bodyPr wrap="none" anchor="ctr">
+            <a:spAutoFit/>
+          </a:bodyPr>
+          <a:lstStyle/>
+          <a:p>
+            <a:r>
+              <a:rPr sz="3600" b="1">
+                <a:solidFill>
+                  <a:srgbClr val="1E40AF"/>
+                </a:solidFill>
+                <a:latin typeface="Arial"/>
+              </a:rPr>
+              <a:t>CHẾ TẠO VÀ THỬ NGHIỆM</a:t>
+            </a:r>
+          </a:p>
+        </p:txBody>
+      </p:sp>
+      <p:sp>
+        <p:nvSpPr>
+          <p:cNvPr id="4" name="Rectangle 3"/>
+          <p:cNvSpPr/>
+          <p:nvPr/>
+        </p:nvSpPr>
+        <p:spPr>
+          <a:xfrm>
+            <a:off x="457200" y="1207008"/>
+            <a:ext cx="11274552" cy="22000"/>
+          </a:xfrm>
+          <a:prstGeom prst="rect">
+            <a:avLst/>
+          </a:prstGeom>
+          <a:solidFill>
+            <a:srgbClr val="E2E8F0"/>
+          </a:solidFill>
+          <a:ln>
+            <a:noFill/>
+          </a:ln>
+          <a:effectLst/>
+        </p:spPr>
+        <p:style>
+          <a:lnRef idx="1">
+            <a:schemeClr val="accent1"/>
+          </a:lnRef>
+          <a:fillRef idx="3">
+            <a:schemeClr val="accent1"/>
+          </a:fillRef>
+          <a:effectRef idx="2">
+            <a:schemeClr val="accent1"/>
+          </a:effectRef>
+          <a:fontRef idx="minor">
+            <a:schemeClr val="lt1"/>
+          </a:fontRef>
+        </p:style>
+        <p:txBody>
+          <a:bodyPr rtlCol="0" anchor="ctr"/>
+          <a:lstStyle/>
+          <a:p>
+            <a:pPr algn="ctr"/>
+          </a:p>
+        </p:txBody>
+      </p:sp>
+      <p:sp>
+        <p:nvSpPr>
+          <p:cNvPr id="5" name="TextBox 4"/>
+          <p:cNvSpPr txBox="1"/>
+          <p:nvPr/>
+        </p:nvSpPr>
+        <p:spPr>
+          <a:xfrm>
+            <a:off x="457200" y="6355080"/>
+            <a:ext cx="11274552" cy="365760"/>
+          </a:xfrm>
+          <a:prstGeom prst="rect">
+            <a:avLst/>
+          </a:prstGeom>
+          <a:noFill/>
+        </p:spPr>
+        <p:txBody>
+          <a:bodyPr wrap="none">
+            <a:spAutoFit/>
+          </a:bodyPr>
+          <a:lstStyle/>
+          <a:p>
+            <a:pPr algn="r"/>
+            <a:r>
+              <a:rPr sz="1200">
+                <a:solidFill>
+                  <a:srgbClr val="64748B"/>
+                </a:solidFill>
+                <a:latin typeface="Calibri"/>
+              </a:rPr>
+              <a:t>Toán 10 · Bài 4. Hệ bất phương trình bậc nhất hai ẩn (STEM)          12</a:t>
+            </a:r>
+          </a:p>
+        </p:txBody>
+      </p:sp>
+      <p:sp>
+        <p:nvSpPr>
+          <p:cNvPr id="6" name="TextBox 5"/>
+          <p:cNvSpPr txBox="1"/>
+          <p:nvPr/>
+        </p:nvSpPr>
+        <p:spPr>
+          <a:xfrm>
+            <a:off x="731520" y="1508760"/>
+            <a:ext cx="10789920" cy="2834640"/>
+          </a:xfrm>
+          <a:prstGeom prst="rect">
+            <a:avLst/>
+          </a:prstGeom>
+          <a:noFill/>
+        </p:spPr>
+        <p:txBody>
+          <a:bodyPr wrap="square" anchor="t">
+            <a:spAutoFit/>
+          </a:bodyPr>
+          <a:lstStyle/>
           <a:p>
             <a:pPr algn="l" marL="365760" indent="-365760">
               <a:spcAft>
@@ -4330,7 +4701,7 @@
                 </a:solidFill>
                 <a:latin typeface="Calibri"/>
               </a:rPr>
-              <a:t>Cân, chế biến, chụp ảnh, quay video</a:t>
+              <a:t>Phiếu 4: bản thiết kế suất ăn</a:t>
             </a:r>
           </a:p>
           <a:p>
@@ -4351,7 +4722,7 @@
                 </a:solidFill>
                 <a:latin typeface="Calibri"/>
               </a:rPr>
-              <a:t>Sai lệch khối lượng không quá 10%</a:t>
+              <a:t>Mua nguyên liệu, giữ hóa đơn</a:t>
             </a:r>
           </a:p>
           <a:p>
@@ -4372,6 +4743,48 @@
                 </a:solidFill>
                 <a:latin typeface="Calibri"/>
               </a:rPr>
+              <a:t>Cân, chế biến, chụp ảnh, quay video</a:t>
+            </a:r>
+          </a:p>
+          <a:p>
+            <a:pPr algn="l" marL="365760" indent="-365760">
+              <a:spcAft>
+                <a:spcPts val="1000"/>
+              </a:spcAft>
+              <a:buClr>
+                <a:srgbClr val="1E40AF"/>
+              </a:buClr>
+              <a:buFont typeface="Arial"/>
+              <a:buChar char="•"/>
+            </a:pPr>
+            <a:r>
+              <a:rPr sz="2400">
+                <a:solidFill>
+                  <a:srgbClr val="1E293B"/>
+                </a:solidFill>
+                <a:latin typeface="Calibri"/>
+              </a:rPr>
+              <a:t>Sai lệch khối lượng không quá 10%</a:t>
+            </a:r>
+          </a:p>
+          <a:p>
+            <a:pPr algn="l" marL="365760" indent="-365760">
+              <a:spcAft>
+                <a:spcPts val="1000"/>
+              </a:spcAft>
+              <a:buClr>
+                <a:srgbClr val="1E40AF"/>
+              </a:buClr>
+              <a:buFont typeface="Arial"/>
+              <a:buChar char="•"/>
+            </a:pPr>
+            <a:r>
+              <a:rPr sz="2400">
+                <a:solidFill>
+                  <a:srgbClr val="1E293B"/>
+                </a:solidFill>
+                <a:latin typeface="Calibri"/>
+              </a:rPr>
               <a:t>Làm poster và 3–5 slide báo cáo</a:t>
             </a:r>
           </a:p>
@@ -4385,7 +4798,7 @@
 </p:sld>
 </file>
 
-<file path=ppt/slides/slide13.xml><?xml version="1.0" encoding="utf-8"?>
+<file path=ppt/slides/slide14.xml><?xml version="1.0" encoding="utf-8"?>
 <p:sld xmlns:a="http://schemas.openxmlformats.org/drawingml/2006/main" xmlns:p="http://schemas.openxmlformats.org/presentationml/2006/main" xmlns:r="http://schemas.openxmlformats.org/officeDocument/2006/relationships">
   <p:cSld>
     <p:bg>
@@ -5184,7 +5597,7 @@
 </p:sld>
 </file>
 
-<file path=ppt/slides/slide14.xml><?xml version="1.0" encoding="utf-8"?>
+<file path=ppt/slides/slide15.xml><?xml version="1.0" encoding="utf-8"?>
 <p:sld xmlns:a="http://schemas.openxmlformats.org/drawingml/2006/main" xmlns:p="http://schemas.openxmlformats.org/presentationml/2006/main" xmlns:r="http://schemas.openxmlformats.org/officeDocument/2006/relationships">
   <p:cSld>
     <p:bg>
@@ -5957,7 +6370,7 @@
 </p:sld>
 </file>
 
-<file path=ppt/slides/slide15.xml><?xml version="1.0" encoding="utf-8"?>
+<file path=ppt/slides/slide16.xml><?xml version="1.0" encoding="utf-8"?>
 <p:sld xmlns:a="http://schemas.openxmlformats.org/drawingml/2006/main" xmlns:p="http://schemas.openxmlformats.org/presentationml/2006/main" xmlns:r="http://schemas.openxmlformats.org/officeDocument/2006/relationships">
   <p:cSld>
     <p:bg>
@@ -6408,7 +6821,7 @@
 </p:sld>
 </file>
 
-<file path=ppt/slides/slide16.xml><?xml version="1.0" encoding="utf-8"?>
+<file path=ppt/slides/slide17.xml><?xml version="1.0" encoding="utf-8"?>
 <p:sld xmlns:a="http://schemas.openxmlformats.org/drawingml/2006/main" xmlns:p="http://schemas.openxmlformats.org/presentationml/2006/main" xmlns:r="http://schemas.openxmlformats.org/officeDocument/2006/relationships">
   <p:cSld>
     <p:bg>
@@ -6954,7 +7367,7 @@
 </p:sld>
 </file>
 
-<file path=ppt/slides/slide17.xml><?xml version="1.0" encoding="utf-8"?>
+<file path=ppt/slides/slide18.xml><?xml version="1.0" encoding="utf-8"?>
 <p:sld xmlns:a="http://schemas.openxmlformats.org/drawingml/2006/main" xmlns:p="http://schemas.openxmlformats.org/presentationml/2006/main" xmlns:r="http://schemas.openxmlformats.org/officeDocument/2006/relationships">
   <p:cSld>
     <p:bg>
@@ -7244,7 +7657,7 @@
 </p:sld>
 </file>
 
-<file path=ppt/slides/slide18.xml><?xml version="1.0" encoding="utf-8"?>
+<file path=ppt/slides/slide19.xml><?xml version="1.0" encoding="utf-8"?>
 <p:sld xmlns:a="http://schemas.openxmlformats.org/drawingml/2006/main" xmlns:p="http://schemas.openxmlformats.org/presentationml/2006/main" xmlns:r="http://schemas.openxmlformats.org/officeDocument/2006/relationships">
   <p:cSld>
     <p:bg>
@@ -8330,6 +8743,1573 @@
 <file path=ppt/slides/slide4.xml><?xml version="1.0" encoding="utf-8"?>
 <p:sld xmlns:a="http://schemas.openxmlformats.org/drawingml/2006/main" xmlns:p="http://schemas.openxmlformats.org/presentationml/2006/main" xmlns:r="http://schemas.openxmlformats.org/officeDocument/2006/relationships">
   <p:cSld>
+    <p:spTree>
+      <p:nvGrpSpPr>
+        <p:cNvPr id="1" name=""/>
+        <p:cNvGrpSpPr/>
+        <p:nvPr/>
+      </p:nvGrpSpPr>
+      <p:grpSpPr/>
+      <p:sp>
+        <p:nvSpPr>
+          <p:cNvPr id="2" name="TextBox 1"/>
+          <p:cNvSpPr txBox="1"/>
+          <p:nvPr/>
+        </p:nvSpPr>
+        <p:spPr>
+          <a:xfrm>
+            <a:off x="365760" y="228600"/>
+            <a:ext cx="11460175" cy="731520"/>
+          </a:xfrm>
+          <a:prstGeom prst="rect">
+            <a:avLst/>
+          </a:prstGeom>
+          <a:noFill/>
+        </p:spPr>
+        <p:txBody>
+          <a:bodyPr wrap="none">
+            <a:spAutoFit/>
+          </a:bodyPr>
+          <a:lstStyle/>
+          <a:p>
+            <a:r>
+              <a:rPr sz="3600" b="1">
+                <a:solidFill>
+                  <a:srgbClr val="1E40AF"/>
+                </a:solidFill>
+                <a:latin typeface="Arial"/>
+              </a:rPr>
+              <a:t>SƠ ĐỒ TƯ DUY BÀI HỌC</a:t>
+            </a:r>
+          </a:p>
+        </p:txBody>
+      </p:sp>
+      <p:cxnSp>
+        <p:nvCxnSpPr>
+          <p:cNvPr id="3" name="Connector 2"/>
+          <p:cNvCxnSpPr/>
+          <p:nvPr/>
+        </p:nvCxnSpPr>
+        <p:spPr>
+          <a:xfrm flipH="1" flipV="1">
+            <a:off x="4338888" y="2670962"/>
+            <a:ext cx="1688379" cy="1283818"/>
+          </a:xfrm>
+          <a:prstGeom prst="line">
+            <a:avLst/>
+          </a:prstGeom>
+          <a:ln w="44450">
+            <a:solidFill>
+              <a:srgbClr val="548235"/>
+            </a:solidFill>
+          </a:ln>
+        </p:spPr>
+        <p:style>
+          <a:lnRef idx="2">
+            <a:schemeClr val="accent1"/>
+          </a:lnRef>
+          <a:fillRef idx="0">
+            <a:schemeClr val="accent1"/>
+          </a:fillRef>
+          <a:effectRef idx="1">
+            <a:schemeClr val="accent1"/>
+          </a:effectRef>
+          <a:fontRef idx="minor">
+            <a:schemeClr val="tx1"/>
+          </a:fontRef>
+        </p:style>
+      </p:cxnSp>
+      <p:cxnSp>
+        <p:nvCxnSpPr>
+          <p:cNvPr id="4" name="Connector 3"/>
+          <p:cNvCxnSpPr/>
+          <p:nvPr/>
+        </p:nvCxnSpPr>
+        <p:spPr>
+          <a:xfrm flipH="1" flipV="1">
+            <a:off x="3065259" y="2357206"/>
+            <a:ext cx="1273629" cy="313756"/>
+          </a:xfrm>
+          <a:prstGeom prst="line">
+            <a:avLst/>
+          </a:prstGeom>
+          <a:ln w="15875">
+            <a:solidFill>
+              <a:srgbClr val="548235"/>
+            </a:solidFill>
+          </a:ln>
+        </p:spPr>
+        <p:style>
+          <a:lnRef idx="2">
+            <a:schemeClr val="accent1"/>
+          </a:lnRef>
+          <a:fillRef idx="0">
+            <a:schemeClr val="accent1"/>
+          </a:fillRef>
+          <a:effectRef idx="1">
+            <a:schemeClr val="accent1"/>
+          </a:effectRef>
+          <a:fontRef idx="minor">
+            <a:schemeClr val="tx1"/>
+          </a:fontRef>
+        </p:style>
+      </p:cxnSp>
+      <p:sp>
+        <p:nvSpPr>
+          <p:cNvPr id="5" name="Rounded Rectangle 4"/>
+          <p:cNvSpPr/>
+          <p:nvPr/>
+        </p:nvSpPr>
+        <p:spPr>
+          <a:xfrm>
+            <a:off x="547382" y="2080894"/>
+            <a:ext cx="2517877" cy="552622"/>
+          </a:xfrm>
+          <a:prstGeom prst="roundRect">
+            <a:avLst>
+              <a:gd name="adj" fmla="val 50000"/>
+            </a:avLst>
+          </a:prstGeom>
+          <a:solidFill>
+            <a:srgbClr val="EDF5E8"/>
+          </a:solidFill>
+          <a:ln w="15875">
+            <a:solidFill>
+              <a:srgbClr val="548235"/>
+            </a:solidFill>
+          </a:ln>
+          <a:effectLst/>
+        </p:spPr>
+        <p:style>
+          <a:lnRef idx="1">
+            <a:schemeClr val="accent1"/>
+          </a:lnRef>
+          <a:fillRef idx="3">
+            <a:schemeClr val="accent1"/>
+          </a:fillRef>
+          <a:effectRef idx="2">
+            <a:schemeClr val="accent1"/>
+          </a:effectRef>
+          <a:fontRef idx="minor">
+            <a:schemeClr val="lt1"/>
+          </a:fontRef>
+        </p:style>
+        <p:txBody>
+          <a:bodyPr rtlCol="0" anchor="ctr" wrap="none" lIns="64000" rIns="64000" tIns="25400" bIns="25400"/>
+          <a:lstStyle/>
+          <a:p>
+            <a:pPr algn="ctr"/>
+            <a:r>
+              <a:rPr sz="1300" b="0">
+                <a:solidFill>
+                  <a:srgbClr val="000000"/>
+                </a:solidFill>
+                <a:latin typeface="Calibri"/>
+              </a:rPr>
+              <a:t>Thực phẩm: protein, lipid,</a:t>
+            </a:r>
+          </a:p>
+          <a:p>
+            <a:pPr algn="ctr"/>
+            <a:r>
+              <a:rPr sz="1300" b="0">
+                <a:solidFill>
+                  <a:srgbClr val="000000"/>
+                </a:solidFill>
+                <a:latin typeface="Calibri"/>
+              </a:rPr>
+              <a:t>glucid</a:t>
+            </a:r>
+          </a:p>
+        </p:txBody>
+      </p:sp>
+      <p:cxnSp>
+        <p:nvCxnSpPr>
+          <p:cNvPr id="6" name="Connector 5"/>
+          <p:cNvCxnSpPr/>
+          <p:nvPr/>
+        </p:nvCxnSpPr>
+        <p:spPr>
+          <a:xfrm flipH="1">
+            <a:off x="2678925" y="2670962"/>
+            <a:ext cx="1659963" cy="313756"/>
+          </a:xfrm>
+          <a:prstGeom prst="line">
+            <a:avLst/>
+          </a:prstGeom>
+          <a:ln w="15875">
+            <a:solidFill>
+              <a:srgbClr val="548235"/>
+            </a:solidFill>
+          </a:ln>
+        </p:spPr>
+        <p:style>
+          <a:lnRef idx="2">
+            <a:schemeClr val="accent1"/>
+          </a:lnRef>
+          <a:fillRef idx="0">
+            <a:schemeClr val="accent1"/>
+          </a:fillRef>
+          <a:effectRef idx="1">
+            <a:schemeClr val="accent1"/>
+          </a:effectRef>
+          <a:fontRef idx="minor">
+            <a:schemeClr val="tx1"/>
+          </a:fontRef>
+        </p:style>
+      </p:cxnSp>
+      <p:sp>
+        <p:nvSpPr>
+          <p:cNvPr id="7" name="Rounded Rectangle 6"/>
+          <p:cNvSpPr/>
+          <p:nvPr/>
+        </p:nvSpPr>
+        <p:spPr>
+          <a:xfrm>
+            <a:off x="933716" y="2708407"/>
+            <a:ext cx="1745209" cy="552622"/>
+          </a:xfrm>
+          <a:prstGeom prst="roundRect">
+            <a:avLst>
+              <a:gd name="adj" fmla="val 50000"/>
+            </a:avLst>
+          </a:prstGeom>
+          <a:solidFill>
+            <a:srgbClr val="EDF5E8"/>
+          </a:solidFill>
+          <a:ln w="15875">
+            <a:solidFill>
+              <a:srgbClr val="548235"/>
+            </a:solidFill>
+          </a:ln>
+          <a:effectLst/>
+        </p:spPr>
+        <p:style>
+          <a:lnRef idx="1">
+            <a:schemeClr val="accent1"/>
+          </a:lnRef>
+          <a:fillRef idx="3">
+            <a:schemeClr val="accent1"/>
+          </a:fillRef>
+          <a:effectRef idx="2">
+            <a:schemeClr val="accent1"/>
+          </a:effectRef>
+          <a:fontRef idx="minor">
+            <a:schemeClr val="lt1"/>
+          </a:fontRef>
+        </p:style>
+        <p:txBody>
+          <a:bodyPr rtlCol="0" anchor="ctr" wrap="none" lIns="64000" rIns="64000" tIns="25400" bIns="25400"/>
+          <a:lstStyle/>
+          <a:p>
+            <a:pPr algn="ctr"/>
+            <a:r>
+              <a:rPr sz="1300" b="0">
+                <a:solidFill>
+                  <a:srgbClr val="000000"/>
+                </a:solidFill>
+                <a:latin typeface="Calibri"/>
+              </a:rPr>
+              <a:t>Biến: x (loại 1),</a:t>
+            </a:r>
+          </a:p>
+          <a:p>
+            <a:pPr algn="ctr"/>
+            <a:r>
+              <a:rPr sz="1300" b="0">
+                <a:solidFill>
+                  <a:srgbClr val="000000"/>
+                </a:solidFill>
+                <a:latin typeface="Calibri"/>
+              </a:rPr>
+              <a:t>y (loại 2)</a:t>
+            </a:r>
+          </a:p>
+        </p:txBody>
+      </p:sp>
+      <p:sp>
+        <p:nvSpPr>
+          <p:cNvPr id="8" name="Oval 7"/>
+          <p:cNvSpPr/>
+          <p:nvPr/>
+        </p:nvSpPr>
+        <p:spPr>
+          <a:xfrm>
+            <a:off x="3294580" y="2090581"/>
+            <a:ext cx="2088617" cy="1160762"/>
+          </a:xfrm>
+          <a:prstGeom prst="ellipse">
+            <a:avLst/>
+          </a:prstGeom>
+          <a:solidFill>
+            <a:srgbClr val="E2EFDA"/>
+          </a:solidFill>
+          <a:ln w="31750">
+            <a:solidFill>
+              <a:srgbClr val="375623"/>
+            </a:solidFill>
+          </a:ln>
+          <a:effectLst/>
+        </p:spPr>
+        <p:style>
+          <a:lnRef idx="1">
+            <a:schemeClr val="accent1"/>
+          </a:lnRef>
+          <a:fillRef idx="3">
+            <a:schemeClr val="accent1"/>
+          </a:fillRef>
+          <a:effectRef idx="2">
+            <a:schemeClr val="accent1"/>
+          </a:effectRef>
+          <a:fontRef idx="minor">
+            <a:schemeClr val="lt1"/>
+          </a:fontRef>
+        </p:style>
+        <p:txBody>
+          <a:bodyPr rtlCol="0" anchor="ctr" wrap="none" lIns="64000" rIns="64000" tIns="25400" bIns="25400"/>
+          <a:lstStyle/>
+          <a:p>
+            <a:pPr algn="ctr"/>
+            <a:r>
+              <a:rPr sz="1500" b="1">
+                <a:solidFill>
+                  <a:srgbClr val="000000"/>
+                </a:solidFill>
+                <a:latin typeface="Calibri"/>
+              </a:rPr>
+              <a:t>Mô hình hóa</a:t>
+            </a:r>
+          </a:p>
+          <a:p>
+            <a:pPr algn="ctr"/>
+            <a:r>
+              <a:rPr sz="1500" b="1">
+                <a:solidFill>
+                  <a:srgbClr val="000000"/>
+                </a:solidFill>
+                <a:latin typeface="Calibri"/>
+              </a:rPr>
+              <a:t>bài toán thực</a:t>
+            </a:r>
+          </a:p>
+          <a:p>
+            <a:pPr algn="ctr"/>
+            <a:r>
+              <a:rPr sz="1500" b="1">
+                <a:solidFill>
+                  <a:srgbClr val="000000"/>
+                </a:solidFill>
+                <a:latin typeface="Calibri"/>
+              </a:rPr>
+              <a:t>tế</a:t>
+            </a:r>
+          </a:p>
+        </p:txBody>
+      </p:sp>
+      <p:cxnSp>
+        <p:nvCxnSpPr>
+          <p:cNvPr id="9" name="Connector 8"/>
+          <p:cNvCxnSpPr/>
+          <p:nvPr/>
+        </p:nvCxnSpPr>
+        <p:spPr>
+          <a:xfrm flipV="1">
+            <a:off x="6027267" y="2670962"/>
+            <a:ext cx="1688379" cy="1283818"/>
+          </a:xfrm>
+          <a:prstGeom prst="line">
+            <a:avLst/>
+          </a:prstGeom>
+          <a:ln w="44450">
+            <a:solidFill>
+              <a:srgbClr val="BF8F00"/>
+            </a:solidFill>
+          </a:ln>
+        </p:spPr>
+        <p:style>
+          <a:lnRef idx="2">
+            <a:schemeClr val="accent1"/>
+          </a:lnRef>
+          <a:fillRef idx="0">
+            <a:schemeClr val="accent1"/>
+          </a:fillRef>
+          <a:effectRef idx="1">
+            <a:schemeClr val="accent1"/>
+          </a:effectRef>
+          <a:fontRef idx="minor">
+            <a:schemeClr val="tx1"/>
+          </a:fontRef>
+        </p:style>
+      </p:cxnSp>
+      <p:cxnSp>
+        <p:nvCxnSpPr>
+          <p:cNvPr id="10" name="Connector 9"/>
+          <p:cNvCxnSpPr/>
+          <p:nvPr/>
+        </p:nvCxnSpPr>
+        <p:spPr>
+          <a:xfrm flipV="1">
+            <a:off x="7715646" y="2043450"/>
+            <a:ext cx="1488259" cy="627512"/>
+          </a:xfrm>
+          <a:prstGeom prst="line">
+            <a:avLst/>
+          </a:prstGeom>
+          <a:ln w="15875">
+            <a:solidFill>
+              <a:srgbClr val="BF8F00"/>
+            </a:solidFill>
+          </a:ln>
+        </p:spPr>
+        <p:style>
+          <a:lnRef idx="2">
+            <a:schemeClr val="accent1"/>
+          </a:lnRef>
+          <a:fillRef idx="0">
+            <a:schemeClr val="accent1"/>
+          </a:fillRef>
+          <a:effectRef idx="1">
+            <a:schemeClr val="accent1"/>
+          </a:effectRef>
+          <a:fontRef idx="minor">
+            <a:schemeClr val="tx1"/>
+          </a:fontRef>
+        </p:style>
+      </p:cxnSp>
+      <p:sp>
+        <p:nvSpPr>
+          <p:cNvPr id="11" name="Rounded Rectangle 10"/>
+          <p:cNvSpPr/>
+          <p:nvPr/>
+        </p:nvSpPr>
+        <p:spPr>
+          <a:xfrm>
+            <a:off x="9203905" y="1767138"/>
+            <a:ext cx="2088617" cy="552622"/>
+          </a:xfrm>
+          <a:prstGeom prst="roundRect">
+            <a:avLst>
+              <a:gd name="adj" fmla="val 50000"/>
+            </a:avLst>
+          </a:prstGeom>
+          <a:solidFill>
+            <a:srgbClr val="FFF8E1"/>
+          </a:solidFill>
+          <a:ln w="15875">
+            <a:solidFill>
+              <a:srgbClr val="BF8F00"/>
+            </a:solidFill>
+          </a:ln>
+          <a:effectLst/>
+        </p:spPr>
+        <p:style>
+          <a:lnRef idx="1">
+            <a:schemeClr val="accent1"/>
+          </a:lnRef>
+          <a:fillRef idx="3">
+            <a:schemeClr val="accent1"/>
+          </a:fillRef>
+          <a:effectRef idx="2">
+            <a:schemeClr val="accent1"/>
+          </a:effectRef>
+          <a:fontRef idx="minor">
+            <a:schemeClr val="lt1"/>
+          </a:fontRef>
+        </p:style>
+        <p:txBody>
+          <a:bodyPr rtlCol="0" anchor="ctr" wrap="none" lIns="64000" rIns="64000" tIns="25400" bIns="25400"/>
+          <a:lstStyle/>
+          <a:p>
+            <a:pPr algn="ctr"/>
+            <a:r>
+              <a:rPr sz="1300" b="0">
+                <a:solidFill>
+                  <a:srgbClr val="000000"/>
+                </a:solidFill>
+                <a:latin typeface="Calibri"/>
+              </a:rPr>
+              <a:t>BPT dinh dưỡng: ax+by</a:t>
+            </a:r>
+          </a:p>
+          <a:p>
+            <a:pPr algn="ctr"/>
+            <a:r>
+              <a:rPr sz="1300" b="0">
+                <a:solidFill>
+                  <a:srgbClr val="000000"/>
+                </a:solidFill>
+                <a:latin typeface="Calibri"/>
+              </a:rPr>
+              <a:t>≥ nhu cầu</a:t>
+            </a:r>
+          </a:p>
+        </p:txBody>
+      </p:sp>
+      <p:cxnSp>
+        <p:nvCxnSpPr>
+          <p:cNvPr id="12" name="Connector 11"/>
+          <p:cNvCxnSpPr/>
+          <p:nvPr/>
+        </p:nvCxnSpPr>
+        <p:spPr>
+          <a:xfrm>
+            <a:off x="7715646" y="2670962"/>
+            <a:ext cx="1445333" cy="0"/>
+          </a:xfrm>
+          <a:prstGeom prst="line">
+            <a:avLst/>
+          </a:prstGeom>
+          <a:ln w="15875">
+            <a:solidFill>
+              <a:srgbClr val="BF8F00"/>
+            </a:solidFill>
+          </a:ln>
+        </p:spPr>
+        <p:style>
+          <a:lnRef idx="2">
+            <a:schemeClr val="accent1"/>
+          </a:lnRef>
+          <a:fillRef idx="0">
+            <a:schemeClr val="accent1"/>
+          </a:fillRef>
+          <a:effectRef idx="1">
+            <a:schemeClr val="accent1"/>
+          </a:effectRef>
+          <a:fontRef idx="minor">
+            <a:schemeClr val="tx1"/>
+          </a:fontRef>
+        </p:style>
+      </p:cxnSp>
+      <p:sp>
+        <p:nvSpPr>
+          <p:cNvPr id="13" name="Rounded Rectangle 12"/>
+          <p:cNvSpPr/>
+          <p:nvPr/>
+        </p:nvSpPr>
+        <p:spPr>
+          <a:xfrm>
+            <a:off x="9160979" y="2394651"/>
+            <a:ext cx="2174469" cy="552622"/>
+          </a:xfrm>
+          <a:prstGeom prst="roundRect">
+            <a:avLst>
+              <a:gd name="adj" fmla="val 50000"/>
+            </a:avLst>
+          </a:prstGeom>
+          <a:solidFill>
+            <a:srgbClr val="FFF8E1"/>
+          </a:solidFill>
+          <a:ln w="15875">
+            <a:solidFill>
+              <a:srgbClr val="BF8F00"/>
+            </a:solidFill>
+          </a:ln>
+          <a:effectLst/>
+        </p:spPr>
+        <p:style>
+          <a:lnRef idx="1">
+            <a:schemeClr val="accent1"/>
+          </a:lnRef>
+          <a:fillRef idx="3">
+            <a:schemeClr val="accent1"/>
+          </a:fillRef>
+          <a:effectRef idx="2">
+            <a:schemeClr val="accent1"/>
+          </a:effectRef>
+          <a:fontRef idx="minor">
+            <a:schemeClr val="lt1"/>
+          </a:fontRef>
+        </p:style>
+        <p:txBody>
+          <a:bodyPr rtlCol="0" anchor="ctr" wrap="none" lIns="64000" rIns="64000" tIns="25400" bIns="25400"/>
+          <a:lstStyle/>
+          <a:p>
+            <a:pPr algn="ctr"/>
+            <a:r>
+              <a:rPr sz="1300" b="0">
+                <a:solidFill>
+                  <a:srgbClr val="000000"/>
+                </a:solidFill>
+                <a:latin typeface="Calibri"/>
+              </a:rPr>
+              <a:t>BPT ngân sách: p₁x+p₂y</a:t>
+            </a:r>
+          </a:p>
+          <a:p>
+            <a:pPr algn="ctr"/>
+            <a:r>
+              <a:rPr sz="1300" b="0">
+                <a:solidFill>
+                  <a:srgbClr val="000000"/>
+                </a:solidFill>
+                <a:latin typeface="Calibri"/>
+              </a:rPr>
+              <a:t>≤ budget</a:t>
+            </a:r>
+          </a:p>
+        </p:txBody>
+      </p:sp>
+      <p:cxnSp>
+        <p:nvCxnSpPr>
+          <p:cNvPr id="14" name="Connector 13"/>
+          <p:cNvCxnSpPr/>
+          <p:nvPr/>
+        </p:nvCxnSpPr>
+        <p:spPr>
+          <a:xfrm>
+            <a:off x="7715646" y="2670962"/>
+            <a:ext cx="1617037" cy="627512"/>
+          </a:xfrm>
+          <a:prstGeom prst="line">
+            <a:avLst/>
+          </a:prstGeom>
+          <a:ln w="15875">
+            <a:solidFill>
+              <a:srgbClr val="BF8F00"/>
+            </a:solidFill>
+          </a:ln>
+        </p:spPr>
+        <p:style>
+          <a:lnRef idx="2">
+            <a:schemeClr val="accent1"/>
+          </a:lnRef>
+          <a:fillRef idx="0">
+            <a:schemeClr val="accent1"/>
+          </a:fillRef>
+          <a:effectRef idx="1">
+            <a:schemeClr val="accent1"/>
+          </a:effectRef>
+          <a:fontRef idx="minor">
+            <a:schemeClr val="tx1"/>
+          </a:fontRef>
+        </p:style>
+      </p:cxnSp>
+      <p:sp>
+        <p:nvSpPr>
+          <p:cNvPr id="15" name="Rounded Rectangle 14"/>
+          <p:cNvSpPr/>
+          <p:nvPr/>
+        </p:nvSpPr>
+        <p:spPr>
+          <a:xfrm>
+            <a:off x="9332683" y="3022163"/>
+            <a:ext cx="1831061" cy="552622"/>
+          </a:xfrm>
+          <a:prstGeom prst="roundRect">
+            <a:avLst>
+              <a:gd name="adj" fmla="val 50000"/>
+            </a:avLst>
+          </a:prstGeom>
+          <a:solidFill>
+            <a:srgbClr val="FFF8E1"/>
+          </a:solidFill>
+          <a:ln w="15875">
+            <a:solidFill>
+              <a:srgbClr val="BF8F00"/>
+            </a:solidFill>
+          </a:ln>
+          <a:effectLst/>
+        </p:spPr>
+        <p:style>
+          <a:lnRef idx="1">
+            <a:schemeClr val="accent1"/>
+          </a:lnRef>
+          <a:fillRef idx="3">
+            <a:schemeClr val="accent1"/>
+          </a:fillRef>
+          <a:effectRef idx="2">
+            <a:schemeClr val="accent1"/>
+          </a:effectRef>
+          <a:fontRef idx="minor">
+            <a:schemeClr val="lt1"/>
+          </a:fontRef>
+        </p:style>
+        <p:txBody>
+          <a:bodyPr rtlCol="0" anchor="ctr" wrap="none" lIns="64000" rIns="64000" tIns="25400" bIns="25400"/>
+          <a:lstStyle/>
+          <a:p>
+            <a:pPr algn="ctr"/>
+            <a:r>
+              <a:rPr sz="1300" b="0">
+                <a:solidFill>
+                  <a:srgbClr val="000000"/>
+                </a:solidFill>
+                <a:latin typeface="Calibri"/>
+              </a:rPr>
+              <a:t>BPT không âm: x≥0,</a:t>
+            </a:r>
+          </a:p>
+          <a:p>
+            <a:pPr algn="ctr"/>
+            <a:r>
+              <a:rPr sz="1300" b="0">
+                <a:solidFill>
+                  <a:srgbClr val="000000"/>
+                </a:solidFill>
+                <a:latin typeface="Calibri"/>
+              </a:rPr>
+              <a:t>y≥0</a:t>
+            </a:r>
+          </a:p>
+        </p:txBody>
+      </p:sp>
+      <p:sp>
+        <p:nvSpPr>
+          <p:cNvPr id="16" name="Oval 15"/>
+          <p:cNvSpPr/>
+          <p:nvPr/>
+        </p:nvSpPr>
+        <p:spPr>
+          <a:xfrm>
+            <a:off x="6740679" y="2259078"/>
+            <a:ext cx="1949933" cy="823767"/>
+          </a:xfrm>
+          <a:prstGeom prst="ellipse">
+            <a:avLst/>
+          </a:prstGeom>
+          <a:solidFill>
+            <a:srgbClr val="FFF2CC"/>
+          </a:solidFill>
+          <a:ln w="31750">
+            <a:solidFill>
+              <a:srgbClr val="BF8F00"/>
+            </a:solidFill>
+          </a:ln>
+          <a:effectLst/>
+        </p:spPr>
+        <p:style>
+          <a:lnRef idx="1">
+            <a:schemeClr val="accent1"/>
+          </a:lnRef>
+          <a:fillRef idx="3">
+            <a:schemeClr val="accent1"/>
+          </a:fillRef>
+          <a:effectRef idx="2">
+            <a:schemeClr val="accent1"/>
+          </a:effectRef>
+          <a:fontRef idx="minor">
+            <a:schemeClr val="lt1"/>
+          </a:fontRef>
+        </p:style>
+        <p:txBody>
+          <a:bodyPr rtlCol="0" anchor="ctr" wrap="none" lIns="64000" rIns="64000" tIns="25400" bIns="25400"/>
+          <a:lstStyle/>
+          <a:p>
+            <a:pPr algn="ctr"/>
+            <a:r>
+              <a:rPr sz="1500" b="1">
+                <a:solidFill>
+                  <a:srgbClr val="000000"/>
+                </a:solidFill>
+                <a:latin typeface="Calibri"/>
+              </a:rPr>
+              <a:t>Lập hệ BPT</a:t>
+            </a:r>
+          </a:p>
+          <a:p>
+            <a:pPr algn="ctr"/>
+            <a:r>
+              <a:rPr sz="1500" b="1">
+                <a:solidFill>
+                  <a:srgbClr val="000000"/>
+                </a:solidFill>
+                <a:latin typeface="Calibri"/>
+              </a:rPr>
+              <a:t>từ ràng buộc</a:t>
+            </a:r>
+          </a:p>
+        </p:txBody>
+      </p:sp>
+      <p:cxnSp>
+        <p:nvCxnSpPr>
+          <p:cNvPr id="17" name="Connector 16"/>
+          <p:cNvCxnSpPr/>
+          <p:nvPr/>
+        </p:nvCxnSpPr>
+        <p:spPr>
+          <a:xfrm flipH="1">
+            <a:off x="4338888" y="3954780"/>
+            <a:ext cx="1688379" cy="1283817"/>
+          </a:xfrm>
+          <a:prstGeom prst="line">
+            <a:avLst/>
+          </a:prstGeom>
+          <a:ln w="44450">
+            <a:solidFill>
+              <a:srgbClr val="2F5597"/>
+            </a:solidFill>
+          </a:ln>
+        </p:spPr>
+        <p:style>
+          <a:lnRef idx="2">
+            <a:schemeClr val="accent1"/>
+          </a:lnRef>
+          <a:fillRef idx="0">
+            <a:schemeClr val="accent1"/>
+          </a:fillRef>
+          <a:effectRef idx="1">
+            <a:schemeClr val="accent1"/>
+          </a:effectRef>
+          <a:fontRef idx="minor">
+            <a:schemeClr val="tx1"/>
+          </a:fontRef>
+        </p:style>
+      </p:cxnSp>
+      <p:cxnSp>
+        <p:nvCxnSpPr>
+          <p:cNvPr id="18" name="Connector 17"/>
+          <p:cNvCxnSpPr/>
+          <p:nvPr/>
+        </p:nvCxnSpPr>
+        <p:spPr>
+          <a:xfrm flipH="1" flipV="1">
+            <a:off x="2807703" y="4711796"/>
+            <a:ext cx="1531185" cy="526801"/>
+          </a:xfrm>
+          <a:prstGeom prst="line">
+            <a:avLst/>
+          </a:prstGeom>
+          <a:ln w="15875">
+            <a:solidFill>
+              <a:srgbClr val="2F5597"/>
+            </a:solidFill>
+          </a:ln>
+        </p:spPr>
+        <p:style>
+          <a:lnRef idx="2">
+            <a:schemeClr val="accent1"/>
+          </a:lnRef>
+          <a:fillRef idx="0">
+            <a:schemeClr val="accent1"/>
+          </a:fillRef>
+          <a:effectRef idx="1">
+            <a:schemeClr val="accent1"/>
+          </a:effectRef>
+          <a:fontRef idx="minor">
+            <a:schemeClr val="tx1"/>
+          </a:fontRef>
+        </p:style>
+      </p:cxnSp>
+      <p:sp>
+        <p:nvSpPr>
+          <p:cNvPr id="19" name="Rounded Rectangle 18"/>
+          <p:cNvSpPr/>
+          <p:nvPr/>
+        </p:nvSpPr>
+        <p:spPr>
+          <a:xfrm>
+            <a:off x="804938" y="4536196"/>
+            <a:ext cx="2002765" cy="351200"/>
+          </a:xfrm>
+          <a:prstGeom prst="roundRect">
+            <a:avLst>
+              <a:gd name="adj" fmla="val 50000"/>
+            </a:avLst>
+          </a:prstGeom>
+          <a:solidFill>
+            <a:srgbClr val="E3EEF9"/>
+          </a:solidFill>
+          <a:ln w="15875">
+            <a:solidFill>
+              <a:srgbClr val="2F5597"/>
+            </a:solidFill>
+          </a:ln>
+          <a:effectLst/>
+        </p:spPr>
+        <p:style>
+          <a:lnRef idx="1">
+            <a:schemeClr val="accent1"/>
+          </a:lnRef>
+          <a:fillRef idx="3">
+            <a:schemeClr val="accent1"/>
+          </a:fillRef>
+          <a:effectRef idx="2">
+            <a:schemeClr val="accent1"/>
+          </a:effectRef>
+          <a:fontRef idx="minor">
+            <a:schemeClr val="lt1"/>
+          </a:fontRef>
+        </p:style>
+        <p:txBody>
+          <a:bodyPr rtlCol="0" anchor="ctr" wrap="none" lIns="64000" rIns="64000" tIns="25400" bIns="25400"/>
+          <a:lstStyle/>
+          <a:p>
+            <a:pPr algn="ctr"/>
+            <a:r>
+              <a:rPr sz="1300" b="0">
+                <a:solidFill>
+                  <a:srgbClr val="000000"/>
+                </a:solidFill>
+                <a:latin typeface="Calibri"/>
+              </a:rPr>
+              <a:t>Vẽ miền nghiệm chung</a:t>
+            </a:r>
+          </a:p>
+        </p:txBody>
+      </p:sp>
+      <p:cxnSp>
+        <p:nvCxnSpPr>
+          <p:cNvPr id="20" name="Connector 19"/>
+          <p:cNvCxnSpPr/>
+          <p:nvPr/>
+        </p:nvCxnSpPr>
+        <p:spPr>
+          <a:xfrm flipH="1" flipV="1">
+            <a:off x="2635999" y="5137886"/>
+            <a:ext cx="1702889" cy="100711"/>
+          </a:xfrm>
+          <a:prstGeom prst="line">
+            <a:avLst/>
+          </a:prstGeom>
+          <a:ln w="15875">
+            <a:solidFill>
+              <a:srgbClr val="2F5597"/>
+            </a:solidFill>
+          </a:ln>
+        </p:spPr>
+        <p:style>
+          <a:lnRef idx="2">
+            <a:schemeClr val="accent1"/>
+          </a:lnRef>
+          <a:fillRef idx="0">
+            <a:schemeClr val="accent1"/>
+          </a:fillRef>
+          <a:effectRef idx="1">
+            <a:schemeClr val="accent1"/>
+          </a:effectRef>
+          <a:fontRef idx="minor">
+            <a:schemeClr val="tx1"/>
+          </a:fontRef>
+        </p:style>
+      </p:cxnSp>
+      <p:sp>
+        <p:nvSpPr>
+          <p:cNvPr id="21" name="Rounded Rectangle 20"/>
+          <p:cNvSpPr/>
+          <p:nvPr/>
+        </p:nvSpPr>
+        <p:spPr>
+          <a:xfrm>
+            <a:off x="976642" y="4962286"/>
+            <a:ext cx="1659357" cy="351200"/>
+          </a:xfrm>
+          <a:prstGeom prst="roundRect">
+            <a:avLst>
+              <a:gd name="adj" fmla="val 50000"/>
+            </a:avLst>
+          </a:prstGeom>
+          <a:solidFill>
+            <a:srgbClr val="E3EEF9"/>
+          </a:solidFill>
+          <a:ln w="15875">
+            <a:solidFill>
+              <a:srgbClr val="2F5597"/>
+            </a:solidFill>
+          </a:ln>
+          <a:effectLst/>
+        </p:spPr>
+        <p:style>
+          <a:lnRef idx="1">
+            <a:schemeClr val="accent1"/>
+          </a:lnRef>
+          <a:fillRef idx="3">
+            <a:schemeClr val="accent1"/>
+          </a:fillRef>
+          <a:effectRef idx="2">
+            <a:schemeClr val="accent1"/>
+          </a:effectRef>
+          <a:fontRef idx="minor">
+            <a:schemeClr val="lt1"/>
+          </a:fontRef>
+        </p:style>
+        <p:txBody>
+          <a:bodyPr rtlCol="0" anchor="ctr" wrap="none" lIns="64000" rIns="64000" tIns="25400" bIns="25400"/>
+          <a:lstStyle/>
+          <a:p>
+            <a:pPr algn="ctr"/>
+            <a:r>
+              <a:rPr sz="1300" b="0">
+                <a:solidFill>
+                  <a:srgbClr val="000000"/>
+                </a:solidFill>
+                <a:latin typeface="Calibri"/>
+              </a:rPr>
+              <a:t>Tìm đỉnh đa giác</a:t>
+            </a:r>
+          </a:p>
+        </p:txBody>
+      </p:sp>
+      <p:cxnSp>
+        <p:nvCxnSpPr>
+          <p:cNvPr id="22" name="Connector 21"/>
+          <p:cNvCxnSpPr/>
+          <p:nvPr/>
+        </p:nvCxnSpPr>
+        <p:spPr>
+          <a:xfrm flipH="1">
+            <a:off x="3022333" y="5238597"/>
+            <a:ext cx="1316555" cy="426090"/>
+          </a:xfrm>
+          <a:prstGeom prst="line">
+            <a:avLst/>
+          </a:prstGeom>
+          <a:ln w="15875">
+            <a:solidFill>
+              <a:srgbClr val="2F5597"/>
+            </a:solidFill>
+          </a:ln>
+        </p:spPr>
+        <p:style>
+          <a:lnRef idx="2">
+            <a:schemeClr val="accent1"/>
+          </a:lnRef>
+          <a:fillRef idx="0">
+            <a:schemeClr val="accent1"/>
+          </a:fillRef>
+          <a:effectRef idx="1">
+            <a:schemeClr val="accent1"/>
+          </a:effectRef>
+          <a:fontRef idx="minor">
+            <a:schemeClr val="tx1"/>
+          </a:fontRef>
+        </p:style>
+      </p:cxnSp>
+      <p:sp>
+        <p:nvSpPr>
+          <p:cNvPr id="23" name="Rounded Rectangle 22"/>
+          <p:cNvSpPr/>
+          <p:nvPr/>
+        </p:nvSpPr>
+        <p:spPr>
+          <a:xfrm>
+            <a:off x="590308" y="5388376"/>
+            <a:ext cx="2432025" cy="552622"/>
+          </a:xfrm>
+          <a:prstGeom prst="roundRect">
+            <a:avLst>
+              <a:gd name="adj" fmla="val 50000"/>
+            </a:avLst>
+          </a:prstGeom>
+          <a:solidFill>
+            <a:srgbClr val="E3EEF9"/>
+          </a:solidFill>
+          <a:ln w="15875">
+            <a:solidFill>
+              <a:srgbClr val="2F5597"/>
+            </a:solidFill>
+          </a:ln>
+          <a:effectLst/>
+        </p:spPr>
+        <p:style>
+          <a:lnRef idx="1">
+            <a:schemeClr val="accent1"/>
+          </a:lnRef>
+          <a:fillRef idx="3">
+            <a:schemeClr val="accent1"/>
+          </a:fillRef>
+          <a:effectRef idx="2">
+            <a:schemeClr val="accent1"/>
+          </a:effectRef>
+          <a:fontRef idx="minor">
+            <a:schemeClr val="lt1"/>
+          </a:fontRef>
+        </p:style>
+        <p:txBody>
+          <a:bodyPr rtlCol="0" anchor="ctr" wrap="none" lIns="64000" rIns="64000" tIns="25400" bIns="25400"/>
+          <a:lstStyle/>
+          <a:p>
+            <a:pPr algn="ctr"/>
+            <a:r>
+              <a:rPr sz="1300" b="0">
+                <a:solidFill>
+                  <a:srgbClr val="000000"/>
+                </a:solidFill>
+                <a:latin typeface="Calibri"/>
+              </a:rPr>
+              <a:t>Hàm mục tiêu f(x,y)=ax+by</a:t>
+            </a:r>
+          </a:p>
+          <a:p>
+            <a:pPr algn="ctr"/>
+            <a:r>
+              <a:rPr sz="1300" b="0">
+                <a:solidFill>
+                  <a:srgbClr val="000000"/>
+                </a:solidFill>
+                <a:latin typeface="Calibri"/>
+              </a:rPr>
+              <a:t>→ min/max</a:t>
+            </a:r>
+          </a:p>
+        </p:txBody>
+      </p:sp>
+      <p:sp>
+        <p:nvSpPr>
+          <p:cNvPr id="24" name="Oval 23"/>
+          <p:cNvSpPr/>
+          <p:nvPr/>
+        </p:nvSpPr>
+        <p:spPr>
+          <a:xfrm>
+            <a:off x="3225238" y="4658216"/>
+            <a:ext cx="2227301" cy="1160762"/>
+          </a:xfrm>
+          <a:prstGeom prst="ellipse">
+            <a:avLst/>
+          </a:prstGeom>
+          <a:solidFill>
+            <a:srgbClr val="E2EFDA"/>
+          </a:solidFill>
+          <a:ln w="31750">
+            <a:solidFill>
+              <a:srgbClr val="375623"/>
+            </a:solidFill>
+          </a:ln>
+          <a:effectLst/>
+        </p:spPr>
+        <p:style>
+          <a:lnRef idx="1">
+            <a:schemeClr val="accent1"/>
+          </a:lnRef>
+          <a:fillRef idx="3">
+            <a:schemeClr val="accent1"/>
+          </a:fillRef>
+          <a:effectRef idx="2">
+            <a:schemeClr val="accent1"/>
+          </a:effectRef>
+          <a:fontRef idx="minor">
+            <a:schemeClr val="lt1"/>
+          </a:fontRef>
+        </p:style>
+        <p:txBody>
+          <a:bodyPr rtlCol="0" anchor="ctr" wrap="none" lIns="64000" rIns="64000" tIns="25400" bIns="25400"/>
+          <a:lstStyle/>
+          <a:p>
+            <a:pPr algn="ctr"/>
+            <a:r>
+              <a:rPr sz="1500" b="1">
+                <a:solidFill>
+                  <a:srgbClr val="000000"/>
+                </a:solidFill>
+                <a:latin typeface="Calibri"/>
+              </a:rPr>
+              <a:t>Vẽ miền nghiệm</a:t>
+            </a:r>
+          </a:p>
+          <a:p>
+            <a:pPr algn="ctr"/>
+            <a:r>
+              <a:rPr sz="1500" b="1">
+                <a:solidFill>
+                  <a:srgbClr val="000000"/>
+                </a:solidFill>
+                <a:latin typeface="Calibri"/>
+              </a:rPr>
+              <a:t>&amp; tìm tối</a:t>
+            </a:r>
+          </a:p>
+          <a:p>
+            <a:pPr algn="ctr"/>
+            <a:r>
+              <a:rPr sz="1500" b="1">
+                <a:solidFill>
+                  <a:srgbClr val="000000"/>
+                </a:solidFill>
+                <a:latin typeface="Calibri"/>
+              </a:rPr>
+              <a:t>ưu</a:t>
+            </a:r>
+          </a:p>
+        </p:txBody>
+      </p:sp>
+      <p:cxnSp>
+        <p:nvCxnSpPr>
+          <p:cNvPr id="25" name="Connector 24"/>
+          <p:cNvCxnSpPr/>
+          <p:nvPr/>
+        </p:nvCxnSpPr>
+        <p:spPr>
+          <a:xfrm>
+            <a:off x="6027267" y="3954780"/>
+            <a:ext cx="1688379" cy="1283817"/>
+          </a:xfrm>
+          <a:prstGeom prst="line">
+            <a:avLst/>
+          </a:prstGeom>
+          <a:ln w="44450">
+            <a:solidFill>
+              <a:srgbClr val="7030A0"/>
+            </a:solidFill>
+          </a:ln>
+        </p:spPr>
+        <p:style>
+          <a:lnRef idx="2">
+            <a:schemeClr val="accent1"/>
+          </a:lnRef>
+          <a:fillRef idx="0">
+            <a:schemeClr val="accent1"/>
+          </a:fillRef>
+          <a:effectRef idx="1">
+            <a:schemeClr val="accent1"/>
+          </a:effectRef>
+          <a:fontRef idx="minor">
+            <a:schemeClr val="tx1"/>
+          </a:fontRef>
+        </p:style>
+      </p:cxnSp>
+      <p:cxnSp>
+        <p:nvCxnSpPr>
+          <p:cNvPr id="26" name="Connector 25"/>
+          <p:cNvCxnSpPr/>
+          <p:nvPr/>
+        </p:nvCxnSpPr>
+        <p:spPr>
+          <a:xfrm flipV="1">
+            <a:off x="7715646" y="4924841"/>
+            <a:ext cx="1617037" cy="313756"/>
+          </a:xfrm>
+          <a:prstGeom prst="line">
+            <a:avLst/>
+          </a:prstGeom>
+          <a:ln w="15875">
+            <a:solidFill>
+              <a:srgbClr val="7030A0"/>
+            </a:solidFill>
+          </a:ln>
+        </p:spPr>
+        <p:style>
+          <a:lnRef idx="2">
+            <a:schemeClr val="accent1"/>
+          </a:lnRef>
+          <a:fillRef idx="0">
+            <a:schemeClr val="accent1"/>
+          </a:fillRef>
+          <a:effectRef idx="1">
+            <a:schemeClr val="accent1"/>
+          </a:effectRef>
+          <a:fontRef idx="minor">
+            <a:schemeClr val="tx1"/>
+          </a:fontRef>
+        </p:style>
+      </p:cxnSp>
+      <p:sp>
+        <p:nvSpPr>
+          <p:cNvPr id="27" name="Rounded Rectangle 26"/>
+          <p:cNvSpPr/>
+          <p:nvPr/>
+        </p:nvSpPr>
+        <p:spPr>
+          <a:xfrm>
+            <a:off x="9332683" y="4648530"/>
+            <a:ext cx="1831061" cy="552622"/>
+          </a:xfrm>
+          <a:prstGeom prst="roundRect">
+            <a:avLst>
+              <a:gd name="adj" fmla="val 50000"/>
+            </a:avLst>
+          </a:prstGeom>
+          <a:solidFill>
+            <a:srgbClr val="F3E8F7"/>
+          </a:solidFill>
+          <a:ln w="15875">
+            <a:solidFill>
+              <a:srgbClr val="7030A0"/>
+            </a:solidFill>
+          </a:ln>
+          <a:effectLst/>
+        </p:spPr>
+        <p:style>
+          <a:lnRef idx="1">
+            <a:schemeClr val="accent1"/>
+          </a:lnRef>
+          <a:fillRef idx="3">
+            <a:schemeClr val="accent1"/>
+          </a:fillRef>
+          <a:effectRef idx="2">
+            <a:schemeClr val="accent1"/>
+          </a:effectRef>
+          <a:fontRef idx="minor">
+            <a:schemeClr val="lt1"/>
+          </a:fontRef>
+        </p:style>
+        <p:txBody>
+          <a:bodyPr rtlCol="0" anchor="ctr" wrap="none" lIns="64000" rIns="64000" tIns="25400" bIns="25400"/>
+          <a:lstStyle/>
+          <a:p>
+            <a:pPr algn="ctr"/>
+            <a:r>
+              <a:rPr sz="1300" b="0">
+                <a:solidFill>
+                  <a:srgbClr val="000000"/>
+                </a:solidFill>
+                <a:latin typeface="Calibri"/>
+              </a:rPr>
+              <a:t>Kiểm tra điều kiện</a:t>
+            </a:r>
+          </a:p>
+          <a:p>
+            <a:pPr algn="ctr"/>
+            <a:r>
+              <a:rPr sz="1300" b="0">
+                <a:solidFill>
+                  <a:srgbClr val="000000"/>
+                </a:solidFill>
+                <a:latin typeface="Calibri"/>
+              </a:rPr>
+              <a:t>thực tế</a:t>
+            </a:r>
+          </a:p>
+        </p:txBody>
+      </p:sp>
+      <p:cxnSp>
+        <p:nvCxnSpPr>
+          <p:cNvPr id="28" name="Connector 27"/>
+          <p:cNvCxnSpPr/>
+          <p:nvPr/>
+        </p:nvCxnSpPr>
+        <p:spPr>
+          <a:xfrm>
+            <a:off x="7715646" y="5238597"/>
+            <a:ext cx="1617037" cy="313756"/>
+          </a:xfrm>
+          <a:prstGeom prst="line">
+            <a:avLst/>
+          </a:prstGeom>
+          <a:ln w="15875">
+            <a:solidFill>
+              <a:srgbClr val="7030A0"/>
+            </a:solidFill>
+          </a:ln>
+        </p:spPr>
+        <p:style>
+          <a:lnRef idx="2">
+            <a:schemeClr val="accent1"/>
+          </a:lnRef>
+          <a:fillRef idx="0">
+            <a:schemeClr val="accent1"/>
+          </a:fillRef>
+          <a:effectRef idx="1">
+            <a:schemeClr val="accent1"/>
+          </a:effectRef>
+          <a:fontRef idx="minor">
+            <a:schemeClr val="tx1"/>
+          </a:fontRef>
+        </p:style>
+      </p:cxnSp>
+      <p:sp>
+        <p:nvSpPr>
+          <p:cNvPr id="29" name="Rounded Rectangle 28"/>
+          <p:cNvSpPr/>
+          <p:nvPr/>
+        </p:nvSpPr>
+        <p:spPr>
+          <a:xfrm>
+            <a:off x="9332683" y="5276042"/>
+            <a:ext cx="1831061" cy="552622"/>
+          </a:xfrm>
+          <a:prstGeom prst="roundRect">
+            <a:avLst>
+              <a:gd name="adj" fmla="val 50000"/>
+            </a:avLst>
+          </a:prstGeom>
+          <a:solidFill>
+            <a:srgbClr val="F3E8F7"/>
+          </a:solidFill>
+          <a:ln w="15875">
+            <a:solidFill>
+              <a:srgbClr val="7030A0"/>
+            </a:solidFill>
+          </a:ln>
+          <a:effectLst/>
+        </p:spPr>
+        <p:style>
+          <a:lnRef idx="1">
+            <a:schemeClr val="accent1"/>
+          </a:lnRef>
+          <a:fillRef idx="3">
+            <a:schemeClr val="accent1"/>
+          </a:fillRef>
+          <a:effectRef idx="2">
+            <a:schemeClr val="accent1"/>
+          </a:effectRef>
+          <a:fontRef idx="minor">
+            <a:schemeClr val="lt1"/>
+          </a:fontRef>
+        </p:style>
+        <p:txBody>
+          <a:bodyPr rtlCol="0" anchor="ctr" wrap="none" lIns="64000" rIns="64000" tIns="25400" bIns="25400"/>
+          <a:lstStyle/>
+          <a:p>
+            <a:pPr algn="ctr"/>
+            <a:r>
+              <a:rPr sz="1300" b="0">
+                <a:solidFill>
+                  <a:srgbClr val="000000"/>
+                </a:solidFill>
+                <a:latin typeface="Calibri"/>
+              </a:rPr>
+              <a:t>Báo cáo STEM: nhóm</a:t>
+            </a:r>
+          </a:p>
+          <a:p>
+            <a:pPr algn="ctr"/>
+            <a:r>
+              <a:rPr sz="1300" b="0">
+                <a:solidFill>
+                  <a:srgbClr val="000000"/>
+                </a:solidFill>
+                <a:latin typeface="Calibri"/>
+              </a:rPr>
+              <a:t>4–6 HS</a:t>
+            </a:r>
+          </a:p>
+        </p:txBody>
+      </p:sp>
+      <p:sp>
+        <p:nvSpPr>
+          <p:cNvPr id="30" name="Oval 29"/>
+          <p:cNvSpPr/>
+          <p:nvPr/>
+        </p:nvSpPr>
+        <p:spPr>
+          <a:xfrm>
+            <a:off x="6879363" y="4826713"/>
+            <a:ext cx="1672565" cy="823767"/>
+          </a:xfrm>
+          <a:prstGeom prst="ellipse">
+            <a:avLst/>
+          </a:prstGeom>
+          <a:solidFill>
+            <a:srgbClr val="FFF2CC"/>
+          </a:solidFill>
+          <a:ln w="31750">
+            <a:solidFill>
+              <a:srgbClr val="BF8F00"/>
+            </a:solidFill>
+          </a:ln>
+          <a:effectLst/>
+        </p:spPr>
+        <p:style>
+          <a:lnRef idx="1">
+            <a:schemeClr val="accent1"/>
+          </a:lnRef>
+          <a:fillRef idx="3">
+            <a:schemeClr val="accent1"/>
+          </a:fillRef>
+          <a:effectRef idx="2">
+            <a:schemeClr val="accent1"/>
+          </a:effectRef>
+          <a:fontRef idx="minor">
+            <a:schemeClr val="lt1"/>
+          </a:fontRef>
+        </p:style>
+        <p:txBody>
+          <a:bodyPr rtlCol="0" anchor="ctr" wrap="none" lIns="64000" rIns="64000" tIns="25400" bIns="25400"/>
+          <a:lstStyle/>
+          <a:p>
+            <a:pPr algn="ctr"/>
+            <a:r>
+              <a:rPr sz="1500" b="1">
+                <a:solidFill>
+                  <a:srgbClr val="000000"/>
+                </a:solidFill>
+                <a:latin typeface="Calibri"/>
+              </a:rPr>
+              <a:t>Đánh giá &amp;</a:t>
+            </a:r>
+          </a:p>
+          <a:p>
+            <a:pPr algn="ctr"/>
+            <a:r>
+              <a:rPr sz="1500" b="1">
+                <a:solidFill>
+                  <a:srgbClr val="000000"/>
+                </a:solidFill>
+                <a:latin typeface="Calibri"/>
+              </a:rPr>
+              <a:t>mở rộng</a:t>
+            </a:r>
+          </a:p>
+        </p:txBody>
+      </p:sp>
+      <p:sp>
+        <p:nvSpPr>
+          <p:cNvPr id="31" name="Oval 30"/>
+          <p:cNvSpPr/>
+          <p:nvPr/>
+        </p:nvSpPr>
+        <p:spPr>
+          <a:xfrm>
+            <a:off x="4941353" y="3484793"/>
+            <a:ext cx="2171828" cy="939972"/>
+          </a:xfrm>
+          <a:prstGeom prst="ellipse">
+            <a:avLst/>
+          </a:prstGeom>
+          <a:solidFill>
+            <a:srgbClr val="002060"/>
+          </a:solidFill>
+          <a:ln w="25400">
+            <a:solidFill>
+              <a:srgbClr val="000B1E"/>
+            </a:solidFill>
+          </a:ln>
+          <a:effectLst/>
+        </p:spPr>
+        <p:style>
+          <a:lnRef idx="1">
+            <a:schemeClr val="accent1"/>
+          </a:lnRef>
+          <a:fillRef idx="3">
+            <a:schemeClr val="accent1"/>
+          </a:fillRef>
+          <a:effectRef idx="2">
+            <a:schemeClr val="accent1"/>
+          </a:effectRef>
+          <a:fontRef idx="minor">
+            <a:schemeClr val="lt1"/>
+          </a:fontRef>
+        </p:style>
+        <p:txBody>
+          <a:bodyPr rtlCol="0" anchor="ctr" wrap="none" lIns="64000" rIns="64000" tIns="25400" bIns="25400"/>
+          <a:lstStyle/>
+          <a:p>
+            <a:pPr algn="ctr"/>
+            <a:r>
+              <a:rPr sz="1700" b="1">
+                <a:solidFill>
+                  <a:srgbClr val="FFFFFF"/>
+                </a:solidFill>
+                <a:latin typeface="Calibri"/>
+              </a:rPr>
+              <a:t>HỆ BPT –</a:t>
+            </a:r>
+          </a:p>
+          <a:p>
+            <a:pPr algn="ctr"/>
+            <a:r>
+              <a:rPr sz="1700" b="1">
+                <a:solidFill>
+                  <a:srgbClr val="FFFFFF"/>
+                </a:solidFill>
+                <a:latin typeface="Calibri"/>
+              </a:rPr>
+              <a:t>KHẨU PHẦN ĂN</a:t>
+            </a:r>
+          </a:p>
+        </p:txBody>
+      </p:sp>
+    </p:spTree>
+  </p:cSld>
+  <p:clrMapOvr>
+    <a:masterClrMapping/>
+  </p:clrMapOvr>
+</p:sld>
+</file>
+
+<file path=ppt/slides/slide5.xml><?xml version="1.0" encoding="utf-8"?>
+<p:sld xmlns:a="http://schemas.openxmlformats.org/drawingml/2006/main" xmlns:p="http://schemas.openxmlformats.org/presentationml/2006/main" xmlns:r="http://schemas.openxmlformats.org/officeDocument/2006/relationships">
+  <p:cSld>
     <p:bg>
       <p:bgPr>
         <a:solidFill>
@@ -8654,7 +10634,7 @@
 </p:sld>
 </file>
 
-<file path=ppt/slides/slide5.xml><?xml version="1.0" encoding="utf-8"?>
+<file path=ppt/slides/slide6.xml><?xml version="1.0" encoding="utf-8"?>
 <p:sld xmlns:a="http://schemas.openxmlformats.org/drawingml/2006/main" xmlns:p="http://schemas.openxmlformats.org/presentationml/2006/main" xmlns:r="http://schemas.openxmlformats.org/officeDocument/2006/relationships">
   <p:cSld>
     <p:bg>
@@ -9189,7 +11169,7 @@
 </p:sld>
 </file>
 
-<file path=ppt/slides/slide6.xml><?xml version="1.0" encoding="utf-8"?>
+<file path=ppt/slides/slide7.xml><?xml version="1.0" encoding="utf-8"?>
 <p:sld xmlns:a="http://schemas.openxmlformats.org/drawingml/2006/main" xmlns:p="http://schemas.openxmlformats.org/presentationml/2006/main" xmlns:r="http://schemas.openxmlformats.org/officeDocument/2006/relationships">
   <p:cSld>
     <p:bg>
@@ -9730,386 +11710,6 @@
 </p:sld>
 </file>
 
-<file path=ppt/slides/slide7.xml><?xml version="1.0" encoding="utf-8"?>
-<p:sld xmlns:a="http://schemas.openxmlformats.org/drawingml/2006/main" xmlns:p="http://schemas.openxmlformats.org/presentationml/2006/main" xmlns:r="http://schemas.openxmlformats.org/officeDocument/2006/relationships">
-  <p:cSld>
-    <p:bg>
-      <p:bgPr>
-        <a:solidFill>
-          <a:srgbClr val="FFFFFF"/>
-        </a:solidFill>
-        <a:effectLst/>
-      </p:bgPr>
-    </p:bg>
-    <p:spTree>
-      <p:nvGrpSpPr>
-        <p:cNvPr id="1" name=""/>
-        <p:cNvGrpSpPr/>
-        <p:nvPr/>
-      </p:nvGrpSpPr>
-      <p:grpSpPr/>
-      <p:sp>
-        <p:nvSpPr>
-          <p:cNvPr id="2" name="Rectangle 1"/>
-          <p:cNvSpPr/>
-          <p:nvPr/>
-        </p:nvSpPr>
-        <p:spPr>
-          <a:xfrm>
-            <a:off x="457200" y="384048"/>
-            <a:ext cx="109728" cy="658368"/>
-          </a:xfrm>
-          <a:prstGeom prst="rect">
-            <a:avLst/>
-          </a:prstGeom>
-          <a:solidFill>
-            <a:srgbClr val="1E40AF"/>
-          </a:solidFill>
-          <a:ln>
-            <a:noFill/>
-          </a:ln>
-          <a:effectLst/>
-        </p:spPr>
-        <p:style>
-          <a:lnRef idx="1">
-            <a:schemeClr val="accent1"/>
-          </a:lnRef>
-          <a:fillRef idx="3">
-            <a:schemeClr val="accent1"/>
-          </a:fillRef>
-          <a:effectRef idx="2">
-            <a:schemeClr val="accent1"/>
-          </a:effectRef>
-          <a:fontRef idx="minor">
-            <a:schemeClr val="lt1"/>
-          </a:fontRef>
-        </p:style>
-        <p:txBody>
-          <a:bodyPr rtlCol="0" anchor="ctr"/>
-          <a:lstStyle/>
-          <a:p>
-            <a:pPr algn="ctr"/>
-          </a:p>
-        </p:txBody>
-      </p:sp>
-      <p:sp>
-        <p:nvSpPr>
-          <p:cNvPr id="3" name="TextBox 2"/>
-          <p:cNvSpPr txBox="1"/>
-          <p:nvPr/>
-        </p:nvSpPr>
-        <p:spPr>
-          <a:xfrm>
-            <a:off x="731520" y="274320"/>
-            <a:ext cx="10972800" cy="868680"/>
-          </a:xfrm>
-          <a:prstGeom prst="rect">
-            <a:avLst/>
-          </a:prstGeom>
-          <a:noFill/>
-        </p:spPr>
-        <p:txBody>
-          <a:bodyPr wrap="none" anchor="ctr">
-            <a:spAutoFit/>
-          </a:bodyPr>
-          <a:lstStyle/>
-          <a:p>
-            <a:r>
-              <a:rPr sz="3600" b="1">
-                <a:solidFill>
-                  <a:srgbClr val="1E40AF"/>
-                </a:solidFill>
-                <a:latin typeface="Arial"/>
-              </a:rPr>
-              <a:t>3. TÌM GTLN, GTNN CỦA F</a:t>
-            </a:r>
-          </a:p>
-        </p:txBody>
-      </p:sp>
-      <p:sp>
-        <p:nvSpPr>
-          <p:cNvPr id="4" name="Rectangle 3"/>
-          <p:cNvSpPr/>
-          <p:nvPr/>
-        </p:nvSpPr>
-        <p:spPr>
-          <a:xfrm>
-            <a:off x="457200" y="1207008"/>
-            <a:ext cx="11274552" cy="22000"/>
-          </a:xfrm>
-          <a:prstGeom prst="rect">
-            <a:avLst/>
-          </a:prstGeom>
-          <a:solidFill>
-            <a:srgbClr val="E2E8F0"/>
-          </a:solidFill>
-          <a:ln>
-            <a:noFill/>
-          </a:ln>
-          <a:effectLst/>
-        </p:spPr>
-        <p:style>
-          <a:lnRef idx="1">
-            <a:schemeClr val="accent1"/>
-          </a:lnRef>
-          <a:fillRef idx="3">
-            <a:schemeClr val="accent1"/>
-          </a:fillRef>
-          <a:effectRef idx="2">
-            <a:schemeClr val="accent1"/>
-          </a:effectRef>
-          <a:fontRef idx="minor">
-            <a:schemeClr val="lt1"/>
-          </a:fontRef>
-        </p:style>
-        <p:txBody>
-          <a:bodyPr rtlCol="0" anchor="ctr"/>
-          <a:lstStyle/>
-          <a:p>
-            <a:pPr algn="ctr"/>
-          </a:p>
-        </p:txBody>
-      </p:sp>
-      <p:sp>
-        <p:nvSpPr>
-          <p:cNvPr id="5" name="TextBox 4"/>
-          <p:cNvSpPr txBox="1"/>
-          <p:nvPr/>
-        </p:nvSpPr>
-        <p:spPr>
-          <a:xfrm>
-            <a:off x="457200" y="6355080"/>
-            <a:ext cx="11274552" cy="365760"/>
-          </a:xfrm>
-          <a:prstGeom prst="rect">
-            <a:avLst/>
-          </a:prstGeom>
-          <a:noFill/>
-        </p:spPr>
-        <p:txBody>
-          <a:bodyPr wrap="none">
-            <a:spAutoFit/>
-          </a:bodyPr>
-          <a:lstStyle/>
-          <a:p>
-            <a:pPr algn="r"/>
-            <a:r>
-              <a:rPr sz="1200">
-                <a:solidFill>
-                  <a:srgbClr val="64748B"/>
-                </a:solidFill>
-                <a:latin typeface="Calibri"/>
-              </a:rPr>
-              <a:t>Toán 10 · Bài 4. Hệ bất phương trình bậc nhất hai ẩn (STEM)          7</a:t>
-            </a:r>
-          </a:p>
-        </p:txBody>
-      </p:sp>
-      <p:sp>
-        <p:nvSpPr>
-          <p:cNvPr id="6" name="TextBox 5"/>
-          <p:cNvSpPr txBox="1"/>
-          <p:nvPr/>
-        </p:nvSpPr>
-        <p:spPr>
-          <a:xfrm>
-            <a:off x="731520" y="1508760"/>
-            <a:ext cx="6400800" cy="1700784"/>
-          </a:xfrm>
-          <a:prstGeom prst="rect">
-            <a:avLst/>
-          </a:prstGeom>
-          <a:noFill/>
-        </p:spPr>
-        <p:txBody>
-          <a:bodyPr wrap="square" anchor="t">
-            <a:spAutoFit/>
-          </a:bodyPr>
-          <a:lstStyle/>
-          <a:p>
-            <a:pPr algn="l" marL="365760" indent="-365760">
-              <a:spcAft>
-                <a:spcPts val="1000"/>
-              </a:spcAft>
-              <a:buClr>
-                <a:srgbClr val="1E40AF"/>
-              </a:buClr>
-              <a:buFont typeface="Arial"/>
-              <a:buChar char="•"/>
-            </a:pPr>
-            <a:r>
-              <a:rPr sz="2400">
-                <a:solidFill>
-                  <a:srgbClr val="1E293B"/>
-                </a:solidFill>
-                <a:latin typeface="Calibri"/>
-              </a:rPr>
-              <a:t>B1. Xác định miền đa giác</a:t>
-            </a:r>
-          </a:p>
-          <a:p>
-            <a:pPr algn="l" marL="365760" indent="-365760">
-              <a:spcAft>
-                <a:spcPts val="1000"/>
-              </a:spcAft>
-              <a:buClr>
-                <a:srgbClr val="1E40AF"/>
-              </a:buClr>
-              <a:buFont typeface="Arial"/>
-              <a:buChar char="•"/>
-            </a:pPr>
-            <a:r>
-              <a:rPr sz="2400">
-                <a:solidFill>
-                  <a:srgbClr val="1E293B"/>
-                </a:solidFill>
-                <a:latin typeface="Calibri"/>
-              </a:rPr>
-              <a:t>B2. Tính F tại các đỉnh</a:t>
-            </a:r>
-          </a:p>
-          <a:p>
-            <a:pPr algn="l" marL="365760" indent="-365760">
-              <a:spcAft>
-                <a:spcPts val="1000"/>
-              </a:spcAft>
-              <a:buClr>
-                <a:srgbClr val="1E40AF"/>
-              </a:buClr>
-              <a:buFont typeface="Arial"/>
-              <a:buChar char="•"/>
-            </a:pPr>
-            <a:r>
-              <a:rPr sz="2400">
-                <a:solidFill>
-                  <a:srgbClr val="1E293B"/>
-                </a:solidFill>
-                <a:latin typeface="Calibri"/>
-              </a:rPr>
-              <a:t>B3. So sánh, kết luận</a:t>
-            </a:r>
-          </a:p>
-        </p:txBody>
-      </p:sp>
-      <p:sp>
-        <p:nvSpPr>
-          <p:cNvPr id="7" name="Rounded Rectangle 6"/>
-          <p:cNvSpPr/>
-          <p:nvPr/>
-        </p:nvSpPr>
-        <p:spPr>
-          <a:xfrm>
-            <a:off x="731520" y="3346704"/>
-            <a:ext cx="6400800" cy="685800"/>
-          </a:xfrm>
-          <a:prstGeom prst="roundRect">
-            <a:avLst>
-              <a:gd name="adj" fmla="val 8000"/>
-            </a:avLst>
-          </a:prstGeom>
-          <a:solidFill>
-            <a:srgbClr val="FEF2F2"/>
-          </a:solidFill>
-          <a:ln w="19050">
-            <a:solidFill>
-              <a:srgbClr val="991B1B"/>
-            </a:solidFill>
-          </a:ln>
-          <a:effectLst/>
-        </p:spPr>
-        <p:style>
-          <a:lnRef idx="1">
-            <a:schemeClr val="accent1"/>
-          </a:lnRef>
-          <a:fillRef idx="3">
-            <a:schemeClr val="accent1"/>
-          </a:fillRef>
-          <a:effectRef idx="2">
-            <a:schemeClr val="accent1"/>
-          </a:effectRef>
-          <a:fontRef idx="minor">
-            <a:schemeClr val="lt1"/>
-          </a:fontRef>
-        </p:style>
-        <p:txBody>
-          <a:bodyPr rtlCol="0" anchor="ctr"/>
-          <a:lstStyle/>
-          <a:p>
-            <a:pPr algn="ctr"/>
-          </a:p>
-        </p:txBody>
-      </p:sp>
-      <p:sp>
-        <p:nvSpPr>
-          <p:cNvPr id="8" name="TextBox 7"/>
-          <p:cNvSpPr txBox="1"/>
-          <p:nvPr/>
-        </p:nvSpPr>
-        <p:spPr>
-          <a:xfrm>
-            <a:off x="914400" y="3346704"/>
-            <a:ext cx="6035040" cy="685800"/>
-          </a:xfrm>
-          <a:prstGeom prst="rect">
-            <a:avLst/>
-          </a:prstGeom>
-          <a:noFill/>
-        </p:spPr>
-        <p:txBody>
-          <a:bodyPr wrap="square" anchor="ctr">
-            <a:spAutoFit/>
-          </a:bodyPr>
-          <a:lstStyle/>
-          <a:p>
-            <a:pPr algn="l">
-              <a:spcAft>
-                <a:spcPts val="400"/>
-              </a:spcAft>
-            </a:pPr>
-            <a:r>
-              <a:rPr sz="2400" b="1">
-                <a:solidFill>
-                  <a:srgbClr val="991B1B"/>
-                </a:solidFill>
-                <a:latin typeface="Calibri"/>
-              </a:rPr>
-              <a:t>F = ax + by: GTLN, GTNN tại đỉnh</a:t>
-            </a:r>
-          </a:p>
-        </p:txBody>
-      </p:sp>
-      <p:pic>
-        <p:nvPicPr>
-          <p:cNvPr id="9" name="Picture 8" descr="rIdS3.png"/>
-          <p:cNvPicPr>
-            <a:picLocks noChangeAspect="1"/>
-          </p:cNvPicPr>
-          <p:nvPr/>
-        </p:nvPicPr>
-        <p:blipFill>
-          <a:blip r:embed="rId2"/>
-          <a:stretch>
-            <a:fillRect/>
-          </a:stretch>
-        </p:blipFill>
-        <p:spPr>
-          <a:xfrm>
-            <a:off x="7406640" y="1473034"/>
-            <a:ext cx="4389120" cy="4689171"/>
-          </a:xfrm>
-          <a:prstGeom prst="rect">
-            <a:avLst/>
-          </a:prstGeom>
-        </p:spPr>
-      </p:pic>
-    </p:spTree>
-  </p:cSld>
-  <p:clrMapOvr>
-    <a:masterClrMapping/>
-  </p:clrMapOvr>
-</p:sld>
-</file>
-
 <file path=ppt/slides/slide8.xml><?xml version="1.0" encoding="utf-8"?>
 <p:sld xmlns:a="http://schemas.openxmlformats.org/drawingml/2006/main" xmlns:p="http://schemas.openxmlformats.org/presentationml/2006/main" xmlns:r="http://schemas.openxmlformats.org/officeDocument/2006/relationships">
   <p:cSld>
@@ -10201,7 +11801,7 @@
                 </a:solidFill>
                 <a:latin typeface="Arial"/>
               </a:rPr>
-              <a:t>GIẢI VẤN ĐỀ 1</a:t>
+              <a:t>3. TÌM GTLN, GTNN CỦA F</a:t>
             </a:r>
           </a:p>
         </p:txBody>
@@ -10280,7 +11880,7 @@
                 </a:solidFill>
                 <a:latin typeface="Calibri"/>
               </a:rPr>
-              <a:t>Toán 10 · Bài 4. Hệ bất phương trình bậc nhất hai ẩn (STEM)          8</a:t>
+              <a:t>Toán 10 · Bài 4. Hệ bất phương trình bậc nhất hai ẩn (STEM)          7</a:t>
             </a:r>
           </a:p>
         </p:txBody>
@@ -10306,22 +11906,6 @@
             <a:spAutoFit/>
           </a:bodyPr>
           <a:lstStyle/>
-          <a:p>
-            <a:pPr algn="l">
-              <a:spcAft>
-                <a:spcPts val="1000"/>
-              </a:spcAft>
-            </a:pPr>
-            <a:r>
-              <a:rPr sz="2400" b="1">
-                <a:solidFill>
-                  <a:srgbClr val="1E40AF"/>
-                </a:solidFill>
-                <a:latin typeface="Calibri"/>
-              </a:rPr>
-              <a:t>F = 3,5x + 2y (triệu đồng)</a:t>
-            </a:r>
-          </a:p>
           <a:p>
             <a:pPr algn="l" marL="365760" indent="-365760">
               <a:spcAft>
@@ -10340,7 +11924,7 @@
                 </a:solidFill>
                 <a:latin typeface="Calibri"/>
               </a:rPr>
-              <a:t>F(0; 100) = 200;  F(20; 80) = 230</a:t>
+              <a:t>B1. Xác định miền đa giác</a:t>
             </a:r>
           </a:p>
           <a:p>
@@ -10361,7 +11945,28 @@
                 </a:solidFill>
                 <a:latin typeface="Calibri"/>
               </a:rPr>
-              <a:t>F(60; 0) = 210;  F(0; 0) = 0</a:t>
+              <a:t>B2. Tính F tại các đỉnh</a:t>
+            </a:r>
+          </a:p>
+          <a:p>
+            <a:pPr algn="l" marL="365760" indent="-365760">
+              <a:spcAft>
+                <a:spcPts val="1000"/>
+              </a:spcAft>
+              <a:buClr>
+                <a:srgbClr val="1E40AF"/>
+              </a:buClr>
+              <a:buFont typeface="Arial"/>
+              <a:buChar char="•"/>
+            </a:pPr>
+            <a:r>
+              <a:rPr sz="2400">
+                <a:solidFill>
+                  <a:srgbClr val="1E293B"/>
+                </a:solidFill>
+                <a:latin typeface="Calibri"/>
+              </a:rPr>
+              <a:t>B3. So sánh, kết luận</a:t>
             </a:r>
           </a:p>
         </p:txBody>
@@ -10448,7 +12053,7 @@
                 </a:solidFill>
                 <a:latin typeface="Calibri"/>
               </a:rPr>
-              <a:t>Nhập 20 máy hai chiều, 80 máy một chiều</a:t>
+              <a:t>F = ax + by: GTLN, GTNN tại đỉnh</a:t>
             </a:r>
           </a:p>
         </p:txBody>
@@ -10576,7 +12181,7 @@
                 </a:solidFill>
                 <a:latin typeface="Arial"/>
               </a:rPr>
-              <a:t>4. KHẨU PHẦN MẪU</a:t>
+              <a:t>GIẢI VẤN ĐỀ 1</a:t>
             </a:r>
           </a:p>
         </p:txBody>
@@ -10655,7 +12260,7 @@
                 </a:solidFill>
                 <a:latin typeface="Calibri"/>
               </a:rPr>
-              <a:t>Toán 10 · Bài 4. Hệ bất phương trình bậc nhất hai ẩn (STEM)          9</a:t>
+              <a:t>Toán 10 · Bài 4. Hệ bất phương trình bậc nhất hai ẩn (STEM)          8</a:t>
             </a:r>
           </a:p>
         </p:txBody>
@@ -10669,7 +12274,7 @@
         <p:spPr>
           <a:xfrm>
             <a:off x="731520" y="1508760"/>
-            <a:ext cx="6400800" cy="2078736"/>
+            <a:ext cx="6400800" cy="1700784"/>
           </a:xfrm>
           <a:prstGeom prst="rect">
             <a:avLst/>
@@ -10688,13 +12293,13 @@
               </a:spcAft>
             </a:pPr>
             <a:r>
-              <a:rPr sz="2200" b="1">
+              <a:rPr sz="2400" b="1">
                 <a:solidFill>
                   <a:srgbClr val="1E40AF"/>
                 </a:solidFill>
                 <a:latin typeface="Calibri"/>
               </a:rPr>
-              <a:t>x lạng thịt nạc, y lạng đậu phụ</a:t>
+              <a:t>F = 3,5x + 2y (triệu đồng)</a:t>
             </a:r>
           </a:p>
           <a:p>
@@ -10709,13 +12314,13 @@
               <a:buChar char="•"/>
             </a:pPr>
             <a:r>
-              <a:rPr sz="2200">
+              <a:rPr sz="2400">
                 <a:solidFill>
                   <a:srgbClr val="1E293B"/>
                 </a:solidFill>
                 <a:latin typeface="Calibri"/>
               </a:rPr>
-              <a:t>Protein: 20x + 10y ≥ 30</a:t>
+              <a:t>F(0; 100) = 200;  F(20; 80) = 230</a:t>
             </a:r>
           </a:p>
           <a:p>
@@ -10730,34 +12335,13 @@
               <a:buChar char="•"/>
             </a:pPr>
             <a:r>
-              <a:rPr sz="2200">
+              <a:rPr sz="2400">
                 <a:solidFill>
                   <a:srgbClr val="1E293B"/>
                 </a:solidFill>
                 <a:latin typeface="Calibri"/>
               </a:rPr>
-              <a:t>Khối lượng: x + y ≤ 3;  y ≤ 2</a:t>
-            </a:r>
-          </a:p>
-          <a:p>
-            <a:pPr algn="l" marL="365760" indent="-365760">
-              <a:spcAft>
-                <a:spcPts val="1000"/>
-              </a:spcAft>
-              <a:buClr>
-                <a:srgbClr val="1E40AF"/>
-              </a:buClr>
-              <a:buFont typeface="Arial"/>
-              <a:buChar char="•"/>
-            </a:pPr>
-            <a:r>
-              <a:rPr sz="2200">
-                <a:solidFill>
-                  <a:srgbClr val="1E293B"/>
-                </a:solidFill>
-                <a:latin typeface="Calibri"/>
-              </a:rPr>
-              <a:t>Chi phí: 15x + 3y ≤ 27 (nghìn)</a:t>
+              <a:t>F(60; 0) = 210;  F(0; 0) = 0</a:t>
             </a:r>
           </a:p>
         </p:txBody>
@@ -10770,8 +12354,8 @@
         </p:nvSpPr>
         <p:spPr>
           <a:xfrm>
-            <a:off x="731520" y="3724656"/>
-            <a:ext cx="6400800" cy="1066799"/>
+            <a:off x="731520" y="3346704"/>
+            <a:ext cx="6400800" cy="685800"/>
           </a:xfrm>
           <a:prstGeom prst="roundRect">
             <a:avLst>
@@ -10818,8 +12402,8 @@
         </p:nvSpPr>
         <p:spPr>
           <a:xfrm>
-            <a:off x="914400" y="3724656"/>
-            <a:ext cx="6035040" cy="1066799"/>
+            <a:off x="914400" y="3346704"/>
+            <a:ext cx="6035040" cy="685800"/>
           </a:xfrm>
           <a:prstGeom prst="rect">
             <a:avLst/>
@@ -10838,36 +12422,20 @@
               </a:spcAft>
             </a:pPr>
             <a:r>
-              <a:rPr sz="2200" b="1">
+              <a:rPr sz="2400" b="1">
                 <a:solidFill>
                   <a:srgbClr val="991B1B"/>
                 </a:solidFill>
                 <a:latin typeface="Calibri"/>
               </a:rPr>
-              <a:t>Rẻ nhất: A(0,5; 2) – 13 500 đồng</a:t>
-            </a:r>
-          </a:p>
-          <a:p>
-            <a:pPr algn="l">
-              <a:spcAft>
-                <a:spcPts val="400"/>
-              </a:spcAft>
-            </a:pPr>
-            <a:r>
-              <a:rPr sz="2200" b="1">
-                <a:solidFill>
-                  <a:srgbClr val="991B1B"/>
-                </a:solidFill>
-                <a:latin typeface="Calibri"/>
-              </a:rPr>
-              <a:t>Nhiều đạm nhất: C(1,5; 1,5) – 45 g</a:t>
+              <a:t>Nhập 20 máy hai chiều, 80 máy một chiều</a:t>
             </a:r>
           </a:p>
         </p:txBody>
       </p:sp>
       <p:pic>
         <p:nvPicPr>
-          <p:cNvPr id="9" name="Picture 8" descr="rIdS8.png"/>
+          <p:cNvPr id="9" name="Picture 8" descr="rIdS3.png"/>
           <p:cNvPicPr>
             <a:picLocks noChangeAspect="1"/>
           </p:cNvPicPr>
@@ -10881,8 +12449,8 @@
         </p:blipFill>
         <p:spPr>
           <a:xfrm>
-            <a:off x="7406640" y="1792321"/>
-            <a:ext cx="4389120" cy="4050597"/>
+            <a:off x="7406640" y="1473034"/>
+            <a:ext cx="4389120" cy="4689171"/>
           </a:xfrm>
           <a:prstGeom prst="rect">
             <a:avLst/>
